--- a/public/fun/pack/pptx/wedding/결혼식_24_오시는길중심_절집풍경.pptx
+++ b/public/fun/pack/pptx/wedding/결혼식_24_오시는길중심_절집풍경.pptx
@@ -3347,7 +3347,7 @@
             <a:r>
               <a:rPr sz="3600" b="1" i="0">
                 <a:solidFill>
-                  <a:srgbClr val="274649"/>
+                  <a:srgbClr val="11595F"/>
                 </a:solidFill>
               </a:rPr>
               <a:t>저희 결혼합니다</a:t>
@@ -3385,7 +3385,7 @@
             <a:r>
               <a:rPr sz="1700" b="0" i="1">
                 <a:solidFill>
-                  <a:srgbClr val="274649"/>
+                  <a:srgbClr val="11595F"/>
                 </a:solidFill>
               </a:rPr>
               <a:t>비 오면 우산이 필요한 길입니다</a:t>
@@ -3460,7 +3460,7 @@
     <p:bg>
       <p:bgPr>
         <a:solidFill>
-          <a:srgbClr val="F2F7F8"/>
+          <a:srgbClr val="EEFBFC"/>
         </a:solidFill>
         <a:effectLst/>
       </p:bgPr>
@@ -3489,7 +3489,7 @@
           <a:noFill/>
           <a:ln w="28575">
             <a:solidFill>
-              <a:srgbClr val="4B868B"/>
+              <a:srgbClr val="26B8C5"/>
             </a:solidFill>
           </a:ln>
         </p:spPr>
@@ -3518,7 +3518,7 @@
           <a:noFill/>
           <a:ln w="9525">
             <a:solidFill>
-              <a:srgbClr val="D6E9EB"/>
+              <a:srgbClr val="D1F7FA"/>
             </a:solidFill>
           </a:ln>
         </p:spPr>
@@ -3560,7 +3560,7 @@
             <a:r>
               <a:rPr sz="3000" b="1" i="0">
                 <a:solidFill>
-                  <a:srgbClr val="274649"/>
+                  <a:srgbClr val="11595F"/>
                 </a:solidFill>
               </a:rPr>
               <a:t>신랑 · 신부 소개</a:t>
@@ -3583,11 +3583,11 @@
             <a:avLst/>
           </a:prstGeom>
           <a:solidFill>
-            <a:srgbClr val="D6E9EB"/>
+            <a:srgbClr val="D1F7FA"/>
           </a:solidFill>
           <a:ln w="19050">
             <a:solidFill>
-              <a:srgbClr val="4B868B"/>
+              <a:srgbClr val="26B8C5"/>
             </a:solidFill>
             <a:prstDash val="dash"/>
           </a:ln>
@@ -3606,7 +3606,7 @@
             <a:r>
               <a:rPr sz="1200" b="0" i="0">
                 <a:solidFill>
-                  <a:srgbClr val="274649"/>
+                  <a:srgbClr val="11595F"/>
                 </a:solidFill>
               </a:rPr>
               <a:t>사진</a:t>
@@ -3644,7 +3644,7 @@
             <a:r>
               <a:rPr sz="1600" b="1" i="0">
                 <a:solidFill>
-                  <a:srgbClr val="274649"/>
+                  <a:srgbClr val="11595F"/>
                 </a:solidFill>
               </a:rPr>
               <a:t>신랑</a:t>
@@ -3735,11 +3735,11 @@
             <a:avLst/>
           </a:prstGeom>
           <a:solidFill>
-            <a:srgbClr val="D6E9EB"/>
+            <a:srgbClr val="D1F7FA"/>
           </a:solidFill>
           <a:ln w="19050">
             <a:solidFill>
-              <a:srgbClr val="4B868B"/>
+              <a:srgbClr val="26B8C5"/>
             </a:solidFill>
             <a:prstDash val="dash"/>
           </a:ln>
@@ -3758,7 +3758,7 @@
             <a:r>
               <a:rPr sz="1200" b="0" i="0">
                 <a:solidFill>
-                  <a:srgbClr val="274649"/>
+                  <a:srgbClr val="11595F"/>
                 </a:solidFill>
               </a:rPr>
               <a:t>사진</a:t>
@@ -3796,7 +3796,7 @@
             <a:r>
               <a:rPr sz="1600" b="1" i="0">
                 <a:solidFill>
-                  <a:srgbClr val="274649"/>
+                  <a:srgbClr val="11595F"/>
                 </a:solidFill>
               </a:rPr>
               <a:t>신부</a:t>
@@ -3886,7 +3886,7 @@
     <p:bg>
       <p:bgPr>
         <a:solidFill>
-          <a:srgbClr val="F2F7F8"/>
+          <a:srgbClr val="EEFBFC"/>
         </a:solidFill>
         <a:effectLst/>
       </p:bgPr>
@@ -3915,7 +3915,7 @@
           <a:noFill/>
           <a:ln w="28575">
             <a:solidFill>
-              <a:srgbClr val="4B868B"/>
+              <a:srgbClr val="26B8C5"/>
             </a:solidFill>
           </a:ln>
         </p:spPr>
@@ -3944,7 +3944,7 @@
           <a:noFill/>
           <a:ln w="9525">
             <a:solidFill>
-              <a:srgbClr val="D6E9EB"/>
+              <a:srgbClr val="D1F7FA"/>
             </a:solidFill>
           </a:ln>
         </p:spPr>
@@ -3986,7 +3986,7 @@
             <a:r>
               <a:rPr sz="3000" b="1" i="0">
                 <a:solidFill>
-                  <a:srgbClr val="274649"/>
+                  <a:srgbClr val="11595F"/>
                 </a:solidFill>
               </a:rPr>
               <a:t>오시는 길</a:t>
@@ -4011,11 +4011,11 @@
             </a:avLst>
           </a:prstGeom>
           <a:solidFill>
-            <a:srgbClr val="D6E9EB"/>
+            <a:srgbClr val="D1F7FA"/>
           </a:solidFill>
           <a:ln w="19050">
             <a:solidFill>
-              <a:srgbClr val="4B868B"/>
+              <a:srgbClr val="26B8C5"/>
             </a:solidFill>
             <a:prstDash val="dash"/>
           </a:ln>
@@ -4034,7 +4034,7 @@
             <a:r>
               <a:rPr sz="1400" b="0" i="0">
                 <a:solidFill>
-                  <a:srgbClr val="274649"/>
+                  <a:srgbClr val="11595F"/>
                 </a:solidFill>
               </a:rPr>
               <a:t>약도 · 지도를 넣어 주세요</a:t>
@@ -4074,7 +4074,7 @@
                       <a:r>
                         <a:rPr sz="1400" b="1">
                           <a:solidFill>
-                            <a:srgbClr val="274649"/>
+                            <a:srgbClr val="11595F"/>
                           </a:solidFill>
                         </a:rPr>
                         <a:t>예식장</a:t>
@@ -4084,30 +4084,30 @@
                   <a:tcPr anchor="ctr" marL="73152" marR="73152">
                     <a:lnL w="9525" cap="flat" cmpd="sng" algn="ctr">
                       <a:solidFill>
-                        <a:srgbClr val="D6E9EB"/>
+                        <a:srgbClr val="D1F7FA"/>
                       </a:solidFill>
                       <a:prstDash val="solid"/>
                     </a:lnL>
                     <a:lnR w="9525" cap="flat" cmpd="sng" algn="ctr">
                       <a:solidFill>
-                        <a:srgbClr val="D6E9EB"/>
+                        <a:srgbClr val="D1F7FA"/>
                       </a:solidFill>
                       <a:prstDash val="solid"/>
                     </a:lnR>
                     <a:lnT w="9525" cap="flat" cmpd="sng" algn="ctr">
                       <a:solidFill>
-                        <a:srgbClr val="D6E9EB"/>
+                        <a:srgbClr val="D1F7FA"/>
                       </a:solidFill>
                       <a:prstDash val="solid"/>
                     </a:lnT>
                     <a:lnB w="9525" cap="flat" cmpd="sng" algn="ctr">
                       <a:solidFill>
-                        <a:srgbClr val="D6E9EB"/>
+                        <a:srgbClr val="D1F7FA"/>
                       </a:solidFill>
                       <a:prstDash val="solid"/>
                     </a:lnB>
                     <a:solidFill>
-                      <a:srgbClr val="D6E9EB"/>
+                      <a:srgbClr val="D1F7FA"/>
                     </a:solidFill>
                   </a:tcPr>
                 </a:tc>
@@ -4130,30 +4130,30 @@
                   <a:tcPr anchor="ctr" marL="73152" marR="73152">
                     <a:lnL w="9525" cap="flat" cmpd="sng" algn="ctr">
                       <a:solidFill>
-                        <a:srgbClr val="D6E9EB"/>
+                        <a:srgbClr val="D1F7FA"/>
                       </a:solidFill>
                       <a:prstDash val="solid"/>
                     </a:lnL>
                     <a:lnR w="9525" cap="flat" cmpd="sng" algn="ctr">
                       <a:solidFill>
-                        <a:srgbClr val="D6E9EB"/>
+                        <a:srgbClr val="D1F7FA"/>
                       </a:solidFill>
                       <a:prstDash val="solid"/>
                     </a:lnR>
                     <a:lnT w="9525" cap="flat" cmpd="sng" algn="ctr">
                       <a:solidFill>
-                        <a:srgbClr val="D6E9EB"/>
+                        <a:srgbClr val="D1F7FA"/>
                       </a:solidFill>
                       <a:prstDash val="solid"/>
                     </a:lnT>
                     <a:lnB w="9525" cap="flat" cmpd="sng" algn="ctr">
                       <a:solidFill>
-                        <a:srgbClr val="D6E9EB"/>
+                        <a:srgbClr val="D1F7FA"/>
                       </a:solidFill>
                       <a:prstDash val="solid"/>
                     </a:lnB>
                     <a:solidFill>
-                      <a:srgbClr val="F2F7F8"/>
+                      <a:srgbClr val="EEFBFC"/>
                     </a:solidFill>
                   </a:tcPr>
                 </a:tc>
@@ -4168,7 +4168,7 @@
                       <a:r>
                         <a:rPr sz="1400" b="1">
                           <a:solidFill>
-                            <a:srgbClr val="274649"/>
+                            <a:srgbClr val="11595F"/>
                           </a:solidFill>
                         </a:rPr>
                         <a:t>주소</a:t>
@@ -4178,30 +4178,30 @@
                   <a:tcPr anchor="ctr" marL="73152" marR="73152">
                     <a:lnL w="9525" cap="flat" cmpd="sng" algn="ctr">
                       <a:solidFill>
-                        <a:srgbClr val="D6E9EB"/>
+                        <a:srgbClr val="D1F7FA"/>
                       </a:solidFill>
                       <a:prstDash val="solid"/>
                     </a:lnL>
                     <a:lnR w="9525" cap="flat" cmpd="sng" algn="ctr">
                       <a:solidFill>
-                        <a:srgbClr val="D6E9EB"/>
+                        <a:srgbClr val="D1F7FA"/>
                       </a:solidFill>
                       <a:prstDash val="solid"/>
                     </a:lnR>
                     <a:lnT w="9525" cap="flat" cmpd="sng" algn="ctr">
                       <a:solidFill>
-                        <a:srgbClr val="D6E9EB"/>
+                        <a:srgbClr val="D1F7FA"/>
                       </a:solidFill>
                       <a:prstDash val="solid"/>
                     </a:lnT>
                     <a:lnB w="9525" cap="flat" cmpd="sng" algn="ctr">
                       <a:solidFill>
-                        <a:srgbClr val="D6E9EB"/>
+                        <a:srgbClr val="D1F7FA"/>
                       </a:solidFill>
                       <a:prstDash val="solid"/>
                     </a:lnB>
                     <a:solidFill>
-                      <a:srgbClr val="D6E9EB"/>
+                      <a:srgbClr val="D1F7FA"/>
                     </a:solidFill>
                   </a:tcPr>
                 </a:tc>
@@ -4224,25 +4224,25 @@
                   <a:tcPr anchor="ctr" marL="73152" marR="73152">
                     <a:lnL w="9525" cap="flat" cmpd="sng" algn="ctr">
                       <a:solidFill>
-                        <a:srgbClr val="D6E9EB"/>
+                        <a:srgbClr val="D1F7FA"/>
                       </a:solidFill>
                       <a:prstDash val="solid"/>
                     </a:lnL>
                     <a:lnR w="9525" cap="flat" cmpd="sng" algn="ctr">
                       <a:solidFill>
-                        <a:srgbClr val="D6E9EB"/>
+                        <a:srgbClr val="D1F7FA"/>
                       </a:solidFill>
                       <a:prstDash val="solid"/>
                     </a:lnR>
                     <a:lnT w="9525" cap="flat" cmpd="sng" algn="ctr">
                       <a:solidFill>
-                        <a:srgbClr val="D6E9EB"/>
+                        <a:srgbClr val="D1F7FA"/>
                       </a:solidFill>
                       <a:prstDash val="solid"/>
                     </a:lnT>
                     <a:lnB w="9525" cap="flat" cmpd="sng" algn="ctr">
                       <a:solidFill>
-                        <a:srgbClr val="D6E9EB"/>
+                        <a:srgbClr val="D1F7FA"/>
                       </a:solidFill>
                       <a:prstDash val="solid"/>
                     </a:lnB>
@@ -4262,7 +4262,7 @@
                       <a:r>
                         <a:rPr sz="1400" b="1">
                           <a:solidFill>
-                            <a:srgbClr val="274649"/>
+                            <a:srgbClr val="11595F"/>
                           </a:solidFill>
                         </a:rPr>
                         <a:t>일시</a:t>
@@ -4272,30 +4272,30 @@
                   <a:tcPr anchor="ctr" marL="73152" marR="73152">
                     <a:lnL w="9525" cap="flat" cmpd="sng" algn="ctr">
                       <a:solidFill>
-                        <a:srgbClr val="D6E9EB"/>
+                        <a:srgbClr val="D1F7FA"/>
                       </a:solidFill>
                       <a:prstDash val="solid"/>
                     </a:lnL>
                     <a:lnR w="9525" cap="flat" cmpd="sng" algn="ctr">
                       <a:solidFill>
-                        <a:srgbClr val="D6E9EB"/>
+                        <a:srgbClr val="D1F7FA"/>
                       </a:solidFill>
                       <a:prstDash val="solid"/>
                     </a:lnR>
                     <a:lnT w="9525" cap="flat" cmpd="sng" algn="ctr">
                       <a:solidFill>
-                        <a:srgbClr val="D6E9EB"/>
+                        <a:srgbClr val="D1F7FA"/>
                       </a:solidFill>
                       <a:prstDash val="solid"/>
                     </a:lnT>
                     <a:lnB w="9525" cap="flat" cmpd="sng" algn="ctr">
                       <a:solidFill>
-                        <a:srgbClr val="D6E9EB"/>
+                        <a:srgbClr val="D1F7FA"/>
                       </a:solidFill>
                       <a:prstDash val="solid"/>
                     </a:lnB>
                     <a:solidFill>
-                      <a:srgbClr val="D6E9EB"/>
+                      <a:srgbClr val="D1F7FA"/>
                     </a:solidFill>
                   </a:tcPr>
                 </a:tc>
@@ -4318,30 +4318,30 @@
                   <a:tcPr anchor="ctr" marL="73152" marR="73152">
                     <a:lnL w="9525" cap="flat" cmpd="sng" algn="ctr">
                       <a:solidFill>
-                        <a:srgbClr val="D6E9EB"/>
+                        <a:srgbClr val="D1F7FA"/>
                       </a:solidFill>
                       <a:prstDash val="solid"/>
                     </a:lnL>
                     <a:lnR w="9525" cap="flat" cmpd="sng" algn="ctr">
                       <a:solidFill>
-                        <a:srgbClr val="D6E9EB"/>
+                        <a:srgbClr val="D1F7FA"/>
                       </a:solidFill>
                       <a:prstDash val="solid"/>
                     </a:lnR>
                     <a:lnT w="9525" cap="flat" cmpd="sng" algn="ctr">
                       <a:solidFill>
-                        <a:srgbClr val="D6E9EB"/>
+                        <a:srgbClr val="D1F7FA"/>
                       </a:solidFill>
                       <a:prstDash val="solid"/>
                     </a:lnT>
                     <a:lnB w="9525" cap="flat" cmpd="sng" algn="ctr">
                       <a:solidFill>
-                        <a:srgbClr val="D6E9EB"/>
+                        <a:srgbClr val="D1F7FA"/>
                       </a:solidFill>
                       <a:prstDash val="solid"/>
                     </a:lnB>
                     <a:solidFill>
-                      <a:srgbClr val="F2F7F8"/>
+                      <a:srgbClr val="EEFBFC"/>
                     </a:solidFill>
                   </a:tcPr>
                 </a:tc>
@@ -4356,7 +4356,7 @@
                       <a:r>
                         <a:rPr sz="1400" b="1">
                           <a:solidFill>
-                            <a:srgbClr val="274649"/>
+                            <a:srgbClr val="11595F"/>
                           </a:solidFill>
                         </a:rPr>
                         <a:t>연락처</a:t>
@@ -4366,30 +4366,30 @@
                   <a:tcPr anchor="ctr" marL="73152" marR="73152">
                     <a:lnL w="9525" cap="flat" cmpd="sng" algn="ctr">
                       <a:solidFill>
-                        <a:srgbClr val="D6E9EB"/>
+                        <a:srgbClr val="D1F7FA"/>
                       </a:solidFill>
                       <a:prstDash val="solid"/>
                     </a:lnL>
                     <a:lnR w="9525" cap="flat" cmpd="sng" algn="ctr">
                       <a:solidFill>
-                        <a:srgbClr val="D6E9EB"/>
+                        <a:srgbClr val="D1F7FA"/>
                       </a:solidFill>
                       <a:prstDash val="solid"/>
                     </a:lnR>
                     <a:lnT w="9525" cap="flat" cmpd="sng" algn="ctr">
                       <a:solidFill>
-                        <a:srgbClr val="D6E9EB"/>
+                        <a:srgbClr val="D1F7FA"/>
                       </a:solidFill>
                       <a:prstDash val="solid"/>
                     </a:lnT>
                     <a:lnB w="9525" cap="flat" cmpd="sng" algn="ctr">
                       <a:solidFill>
-                        <a:srgbClr val="D6E9EB"/>
+                        <a:srgbClr val="D1F7FA"/>
                       </a:solidFill>
                       <a:prstDash val="solid"/>
                     </a:lnB>
                     <a:solidFill>
-                      <a:srgbClr val="D6E9EB"/>
+                      <a:srgbClr val="D1F7FA"/>
                     </a:solidFill>
                   </a:tcPr>
                 </a:tc>
@@ -4412,25 +4412,25 @@
                   <a:tcPr anchor="ctr" marL="73152" marR="73152">
                     <a:lnL w="9525" cap="flat" cmpd="sng" algn="ctr">
                       <a:solidFill>
-                        <a:srgbClr val="D6E9EB"/>
+                        <a:srgbClr val="D1F7FA"/>
                       </a:solidFill>
                       <a:prstDash val="solid"/>
                     </a:lnL>
                     <a:lnR w="9525" cap="flat" cmpd="sng" algn="ctr">
                       <a:solidFill>
-                        <a:srgbClr val="D6E9EB"/>
+                        <a:srgbClr val="D1F7FA"/>
                       </a:solidFill>
                       <a:prstDash val="solid"/>
                     </a:lnR>
                     <a:lnT w="9525" cap="flat" cmpd="sng" algn="ctr">
                       <a:solidFill>
-                        <a:srgbClr val="D6E9EB"/>
+                        <a:srgbClr val="D1F7FA"/>
                       </a:solidFill>
                       <a:prstDash val="solid"/>
                     </a:lnT>
                     <a:lnB w="9525" cap="flat" cmpd="sng" algn="ctr">
                       <a:solidFill>
-                        <a:srgbClr val="D6E9EB"/>
+                        <a:srgbClr val="D1F7FA"/>
                       </a:solidFill>
                       <a:prstDash val="solid"/>
                     </a:lnB>
@@ -4458,7 +4458,7 @@
     <p:bg>
       <p:bgPr>
         <a:solidFill>
-          <a:srgbClr val="F2F7F8"/>
+          <a:srgbClr val="EEFBFC"/>
         </a:solidFill>
         <a:effectLst/>
       </p:bgPr>
@@ -4487,7 +4487,7 @@
           <a:noFill/>
           <a:ln w="28575">
             <a:solidFill>
-              <a:srgbClr val="4B868B"/>
+              <a:srgbClr val="26B8C5"/>
             </a:solidFill>
           </a:ln>
         </p:spPr>
@@ -4516,7 +4516,7 @@
           <a:noFill/>
           <a:ln w="9525">
             <a:solidFill>
-              <a:srgbClr val="D6E9EB"/>
+              <a:srgbClr val="D1F7FA"/>
             </a:solidFill>
           </a:ln>
         </p:spPr>
@@ -4558,7 +4558,7 @@
             <a:r>
               <a:rPr sz="3000" b="1" i="0">
                 <a:solidFill>
-                  <a:srgbClr val="274649"/>
+                  <a:srgbClr val="11595F"/>
                 </a:solidFill>
               </a:rPr>
               <a:t>교통 안내</a:t>
@@ -4583,11 +4583,11 @@
             </a:avLst>
           </a:prstGeom>
           <a:solidFill>
-            <a:srgbClr val="F2F7F8"/>
+            <a:srgbClr val="EEFBFC"/>
           </a:solidFill>
           <a:ln w="15875">
             <a:solidFill>
-              <a:srgbClr val="D6E9EB"/>
+              <a:srgbClr val="D1F7FA"/>
             </a:solidFill>
           </a:ln>
         </p:spPr>
@@ -4614,7 +4614,7 @@
             <a:avLst/>
           </a:prstGeom>
           <a:solidFill>
-            <a:srgbClr val="4B868B"/>
+            <a:srgbClr val="26B8C5"/>
           </a:solidFill>
           <a:ln>
             <a:noFill/>
@@ -4672,7 +4672,7 @@
             <a:r>
               <a:rPr sz="1800" b="1" i="0">
                 <a:solidFill>
-                  <a:srgbClr val="274649"/>
+                  <a:srgbClr val="11595F"/>
                 </a:solidFill>
               </a:rPr>
               <a:t>지하철</a:t>
@@ -4735,11 +4735,11 @@
             </a:avLst>
           </a:prstGeom>
           <a:solidFill>
-            <a:srgbClr val="F2F7F8"/>
+            <a:srgbClr val="EEFBFC"/>
           </a:solidFill>
           <a:ln w="15875">
             <a:solidFill>
-              <a:srgbClr val="D6E9EB"/>
+              <a:srgbClr val="D1F7FA"/>
             </a:solidFill>
           </a:ln>
         </p:spPr>
@@ -4766,7 +4766,7 @@
             <a:avLst/>
           </a:prstGeom>
           <a:solidFill>
-            <a:srgbClr val="4B868B"/>
+            <a:srgbClr val="26B8C5"/>
           </a:solidFill>
           <a:ln>
             <a:noFill/>
@@ -4824,7 +4824,7 @@
             <a:r>
               <a:rPr sz="1800" b="1" i="0">
                 <a:solidFill>
-                  <a:srgbClr val="274649"/>
+                  <a:srgbClr val="11595F"/>
                 </a:solidFill>
               </a:rPr>
               <a:t>버스</a:t>
@@ -4887,11 +4887,11 @@
             </a:avLst>
           </a:prstGeom>
           <a:solidFill>
-            <a:srgbClr val="F2F7F8"/>
+            <a:srgbClr val="EEFBFC"/>
           </a:solidFill>
           <a:ln w="15875">
             <a:solidFill>
-              <a:srgbClr val="D6E9EB"/>
+              <a:srgbClr val="D1F7FA"/>
             </a:solidFill>
           </a:ln>
         </p:spPr>
@@ -4918,7 +4918,7 @@
             <a:avLst/>
           </a:prstGeom>
           <a:solidFill>
-            <a:srgbClr val="4B868B"/>
+            <a:srgbClr val="26B8C5"/>
           </a:solidFill>
           <a:ln>
             <a:noFill/>
@@ -4976,7 +4976,7 @@
             <a:r>
               <a:rPr sz="1800" b="1" i="0">
                 <a:solidFill>
-                  <a:srgbClr val="274649"/>
+                  <a:srgbClr val="11595F"/>
                 </a:solidFill>
               </a:rPr>
               <a:t>자가용 · 주차</a:t>
@@ -5036,7 +5036,7 @@
     <p:bg>
       <p:bgPr>
         <a:solidFill>
-          <a:srgbClr val="F2F7F8"/>
+          <a:srgbClr val="EEFBFC"/>
         </a:solidFill>
         <a:effectLst/>
       </p:bgPr>
@@ -5065,7 +5065,7 @@
           <a:noFill/>
           <a:ln w="28575">
             <a:solidFill>
-              <a:srgbClr val="4B868B"/>
+              <a:srgbClr val="26B8C5"/>
             </a:solidFill>
           </a:ln>
         </p:spPr>
@@ -5094,7 +5094,7 @@
           <a:noFill/>
           <a:ln w="9525">
             <a:solidFill>
-              <a:srgbClr val="D6E9EB"/>
+              <a:srgbClr val="D1F7FA"/>
             </a:solidFill>
           </a:ln>
         </p:spPr>
@@ -5136,7 +5136,7 @@
             <a:r>
               <a:rPr sz="3000" b="1" i="0">
                 <a:solidFill>
-                  <a:srgbClr val="274649"/>
+                  <a:srgbClr val="11595F"/>
                 </a:solidFill>
               </a:rPr>
               <a:t>웨딩 사진</a:t>
@@ -5161,11 +5161,11 @@
             </a:avLst>
           </a:prstGeom>
           <a:solidFill>
-            <a:srgbClr val="D6E9EB"/>
+            <a:srgbClr val="D1F7FA"/>
           </a:solidFill>
           <a:ln w="19050">
             <a:solidFill>
-              <a:srgbClr val="4B868B"/>
+              <a:srgbClr val="26B8C5"/>
             </a:solidFill>
             <a:prstDash val="dash"/>
           </a:ln>
@@ -5184,7 +5184,7 @@
             <a:r>
               <a:rPr sz="1200" b="0" i="0">
                 <a:solidFill>
-                  <a:srgbClr val="274649"/>
+                  <a:srgbClr val="11595F"/>
                 </a:solidFill>
               </a:rPr>
               <a:t>사진 1</a:t>
@@ -5209,11 +5209,11 @@
             </a:avLst>
           </a:prstGeom>
           <a:solidFill>
-            <a:srgbClr val="D6E9EB"/>
+            <a:srgbClr val="D1F7FA"/>
           </a:solidFill>
           <a:ln w="19050">
             <a:solidFill>
-              <a:srgbClr val="4B868B"/>
+              <a:srgbClr val="26B8C5"/>
             </a:solidFill>
             <a:prstDash val="dash"/>
           </a:ln>
@@ -5232,7 +5232,7 @@
             <a:r>
               <a:rPr sz="1200" b="0" i="0">
                 <a:solidFill>
-                  <a:srgbClr val="274649"/>
+                  <a:srgbClr val="11595F"/>
                 </a:solidFill>
               </a:rPr>
               <a:t>사진 2</a:t>
@@ -5257,11 +5257,11 @@
             </a:avLst>
           </a:prstGeom>
           <a:solidFill>
-            <a:srgbClr val="D6E9EB"/>
+            <a:srgbClr val="D1F7FA"/>
           </a:solidFill>
           <a:ln w="19050">
             <a:solidFill>
-              <a:srgbClr val="4B868B"/>
+              <a:srgbClr val="26B8C5"/>
             </a:solidFill>
             <a:prstDash val="dash"/>
           </a:ln>
@@ -5280,7 +5280,7 @@
             <a:r>
               <a:rPr sz="1200" b="0" i="0">
                 <a:solidFill>
-                  <a:srgbClr val="274649"/>
+                  <a:srgbClr val="11595F"/>
                 </a:solidFill>
               </a:rPr>
               <a:t>사진 3</a:t>
@@ -5305,11 +5305,11 @@
             </a:avLst>
           </a:prstGeom>
           <a:solidFill>
-            <a:srgbClr val="D6E9EB"/>
+            <a:srgbClr val="D1F7FA"/>
           </a:solidFill>
           <a:ln w="19050">
             <a:solidFill>
-              <a:srgbClr val="4B868B"/>
+              <a:srgbClr val="26B8C5"/>
             </a:solidFill>
             <a:prstDash val="dash"/>
           </a:ln>
@@ -5328,7 +5328,7 @@
             <a:r>
               <a:rPr sz="1200" b="0" i="0">
                 <a:solidFill>
-                  <a:srgbClr val="274649"/>
+                  <a:srgbClr val="11595F"/>
                 </a:solidFill>
               </a:rPr>
               <a:t>사진 4</a:t>
@@ -5353,11 +5353,11 @@
             </a:avLst>
           </a:prstGeom>
           <a:solidFill>
-            <a:srgbClr val="D6E9EB"/>
+            <a:srgbClr val="D1F7FA"/>
           </a:solidFill>
           <a:ln w="19050">
             <a:solidFill>
-              <a:srgbClr val="4B868B"/>
+              <a:srgbClr val="26B8C5"/>
             </a:solidFill>
             <a:prstDash val="dash"/>
           </a:ln>
@@ -5376,7 +5376,7 @@
             <a:r>
               <a:rPr sz="1200" b="0" i="0">
                 <a:solidFill>
-                  <a:srgbClr val="274649"/>
+                  <a:srgbClr val="11595F"/>
                 </a:solidFill>
               </a:rPr>
               <a:t>사진 5</a:t>
@@ -5401,11 +5401,11 @@
             </a:avLst>
           </a:prstGeom>
           <a:solidFill>
-            <a:srgbClr val="D6E9EB"/>
+            <a:srgbClr val="D1F7FA"/>
           </a:solidFill>
           <a:ln w="19050">
             <a:solidFill>
-              <a:srgbClr val="4B868B"/>
+              <a:srgbClr val="26B8C5"/>
             </a:solidFill>
             <a:prstDash val="dash"/>
           </a:ln>
@@ -5424,7 +5424,7 @@
             <a:r>
               <a:rPr sz="1200" b="0" i="0">
                 <a:solidFill>
-                  <a:srgbClr val="274649"/>
+                  <a:srgbClr val="11595F"/>
                 </a:solidFill>
               </a:rPr>
               <a:t>사진 6</a:t>
@@ -5504,7 +5504,7 @@
             <a:r>
               <a:rPr sz="3400" b="1" i="0">
                 <a:solidFill>
-                  <a:srgbClr val="274649"/>
+                  <a:srgbClr val="11595F"/>
                 </a:solidFill>
               </a:rPr>
               <a:t>와 주셔서 고맙습니다</a:t>
@@ -5542,7 +5542,7 @@
             <a:r>
               <a:rPr sz="1700" b="0" i="1">
                 <a:solidFill>
-                  <a:srgbClr val="274649"/>
+                  <a:srgbClr val="11595F"/>
                 </a:solidFill>
               </a:rPr>
               <a:t>잘 살겠습니다</a:t>
@@ -5607,34 +5607,34 @@
         <a:sysClr val="window" lastClr="FFFFFF"/>
       </a:lt1>
       <a:dk2>
-        <a:srgbClr val="274649"/>
+        <a:srgbClr val="11595F"/>
       </a:dk2>
       <a:lt2>
-        <a:srgbClr val="F2F7F8"/>
+        <a:srgbClr val="EEFBFC"/>
       </a:lt2>
       <a:accent1>
-        <a:srgbClr val="4B868B"/>
+        <a:srgbClr val="26B8C5"/>
       </a:accent1>
       <a:accent2>
-        <a:srgbClr val="854761"/>
+        <a:srgbClr val="209DB6"/>
       </a:accent2>
       <a:accent3>
-        <a:srgbClr val="274649"/>
+        <a:srgbClr val="11595F"/>
       </a:accent3>
       <a:accent4>
-        <a:srgbClr val="D6E9EB"/>
+        <a:srgbClr val="D1F7FA"/>
       </a:accent4>
       <a:accent5>
-        <a:srgbClr val="686676"/>
+        <a:srgbClr val="23AABE"/>
       </a:accent5>
       <a:accent6>
-        <a:srgbClr val="7D9092"/>
+        <a:srgbClr val="709B9F"/>
       </a:accent6>
       <a:hlink>
-        <a:srgbClr val="4B868B"/>
+        <a:srgbClr val="26B8C5"/>
       </a:hlink>
       <a:folHlink>
-        <a:srgbClr val="274649"/>
+        <a:srgbClr val="11595F"/>
       </a:folHlink>
     </a:clrScheme>
     <a:fontScheme name="Office">

--- a/public/fun/pack/pptx/wedding/결혼식_24_오시는길중심_절집풍경.pptx
+++ b/public/fun/pack/pptx/wedding/결혼식_24_오시는길중심_절집풍경.pptx
@@ -3286,6 +3286,14 @@
 <file path=ppt/slides/slide1.xml><?xml version="1.0" encoding="utf-8"?>
 <p:sld xmlns:a="http://schemas.openxmlformats.org/drawingml/2006/main" xmlns:p="http://schemas.openxmlformats.org/presentationml/2006/main" xmlns:r="http://schemas.openxmlformats.org/officeDocument/2006/relationships">
   <p:cSld>
+    <p:bg>
+      <p:bgPr>
+        <a:solidFill>
+          <a:srgbClr val="EAFBFD"/>
+        </a:solidFill>
+        <a:effectLst/>
+      </p:bgPr>
+    </p:bg>
     <p:spTree>
       <p:nvGrpSpPr>
         <p:cNvPr id="1" name=""/>
@@ -3293,30 +3301,116 @@
         <p:nvPr/>
       </p:nvGrpSpPr>
       <p:grpSpPr/>
-      <p:pic>
-        <p:nvPicPr>
-          <p:cNvPr id="3" name="표지 그림" descr="wedding-24.jpg"/>
-          <p:cNvPicPr>
-            <a:picLocks noChangeAspect="1"/>
-          </p:cNvPicPr>
+      <p:sp>
+        <p:nvSpPr>
+          <p:cNvPr id="3" name="사진 자리"/>
+          <p:cNvSpPr/>
           <p:nvPr/>
-        </p:nvPicPr>
-        <p:blipFill>
-          <a:blip r:embed="rId2"/>
-          <a:stretch>
-            <a:fillRect/>
-          </a:stretch>
-        </p:blipFill>
+        </p:nvSpPr>
         <p:spPr>
           <a:xfrm>
             <a:off x="0" y="0"/>
-            <a:ext cx="12191695" cy="6858000"/>
+            <a:ext cx="4389010" cy="6858000"/>
           </a:xfrm>
           <a:prstGeom prst="rect">
             <a:avLst/>
           </a:prstGeom>
-        </p:spPr>
-      </p:pic>
+          <a:solidFill>
+            <a:srgbClr val="A5EDF3"/>
+          </a:solidFill>
+          <a:ln>
+            <a:noFill/>
+          </a:ln>
+        </p:spPr>
+        <p:txBody>
+          <a:bodyPr rtlCol="0" anchor="ctr" wrap="square" lIns="54864" rIns="54864" tIns="27432" bIns="27432">
+            <a:noAutofit/>
+          </a:bodyPr>
+          <a:lstStyle/>
+          <a:p>
+            <a:pPr algn="ctr">
+              <a:lnSpc>
+                <a:spcPct val="100000"/>
+              </a:lnSpc>
+            </a:pPr>
+            <a:r>
+              <a:rPr sz="1400" b="0" i="0">
+                <a:solidFill>
+                  <a:srgbClr val="274649"/>
+                </a:solidFill>
+              </a:rPr>
+              <a:t>사진을 넣어 주세요</a:t>
+            </a:r>
+          </a:p>
+        </p:txBody>
+      </p:sp>
+      <p:sp>
+        <p:nvSpPr>
+          <p:cNvPr id="4" name="장식"/>
+          <p:cNvSpPr/>
+          <p:nvPr/>
+        </p:nvSpPr>
+        <p:spPr>
+          <a:xfrm>
+            <a:off x="365750" y="365760"/>
+            <a:ext cx="3657508" cy="6126480"/>
+          </a:xfrm>
+          <a:prstGeom prst="rect">
+            <a:avLst/>
+          </a:prstGeom>
+          <a:noFill/>
+          <a:ln w="9525">
+            <a:solidFill>
+              <a:srgbClr val="26231F"/>
+            </a:solidFill>
+          </a:ln>
+        </p:spPr>
+        <p:txBody>
+          <a:bodyPr rtlCol="0" anchor="ctr"/>
+          <a:lstStyle/>
+          <a:p>
+            <a:pPr algn="ctr"/>
+          </a:p>
+        </p:txBody>
+      </p:sp>
+      <p:sp>
+        <p:nvSpPr>
+          <p:cNvPr id="5" name="라벨"/>
+          <p:cNvSpPr txBox="1"/>
+          <p:nvPr/>
+        </p:nvSpPr>
+        <p:spPr>
+          <a:xfrm>
+            <a:off x="6827349" y="2148840"/>
+            <a:ext cx="4632844" cy="274320"/>
+          </a:xfrm>
+          <a:prstGeom prst="rect">
+            <a:avLst/>
+          </a:prstGeom>
+          <a:noFill/>
+        </p:spPr>
+        <p:txBody>
+          <a:bodyPr wrap="square" lIns="54864" rIns="54864" tIns="27432" bIns="27432" anchor="t">
+            <a:noAutofit/>
+          </a:bodyPr>
+          <a:lstStyle/>
+          <a:p>
+            <a:pPr algn="l">
+              <a:lnSpc>
+                <a:spcPct val="115000"/>
+              </a:lnSpc>
+            </a:pPr>
+            <a:r>
+              <a:rPr sz="1000" b="1" i="0" spc="250">
+                <a:solidFill>
+                  <a:srgbClr val="26231F"/>
+                </a:solidFill>
+              </a:rPr>
+              <a:t>WEDDING</a:t>
+            </a:r>
+          </a:p>
+        </p:txBody>
+      </p:sp>
       <p:sp>
         <p:nvSpPr>
           <p:cNvPr id="2" name="Title 1"/>
@@ -3329,8 +3423,8 @@
         </p:nvSpPr>
         <p:spPr>
           <a:xfrm>
-            <a:off x="853418" y="2057400"/>
-            <a:ext cx="6095847" cy="1554480"/>
+            <a:off x="6827349" y="2606040"/>
+            <a:ext cx="4632844" cy="1188720"/>
           </a:xfrm>
         </p:spPr>
         <p:txBody>
@@ -3347,7 +3441,7 @@
             <a:r>
               <a:rPr sz="3600" b="1" i="0">
                 <a:solidFill>
-                  <a:srgbClr val="11595F"/>
+                  <a:srgbClr val="26231F"/>
                 </a:solidFill>
               </a:rPr>
               <a:t>저희 결혼합니다</a:t>
@@ -3357,14 +3451,14 @@
       </p:sp>
       <p:sp>
         <p:nvSpPr>
-          <p:cNvPr id="4" name="한 줄 문구"/>
+          <p:cNvPr id="6" name="한 줄 문구"/>
           <p:cNvSpPr txBox="1"/>
           <p:nvPr/>
         </p:nvSpPr>
         <p:spPr>
           <a:xfrm>
-            <a:off x="853418" y="3749039"/>
-            <a:ext cx="6095847" cy="822960"/>
+            <a:off x="6827349" y="3886200"/>
+            <a:ext cx="4632844" cy="822960"/>
           </a:xfrm>
           <a:prstGeom prst="rect">
             <a:avLst/>
@@ -3383,26 +3477,26 @@
               </a:lnSpc>
             </a:pPr>
             <a:r>
-              <a:rPr sz="1700" b="0" i="1">
-                <a:solidFill>
-                  <a:srgbClr val="11595F"/>
+              <a:rPr sz="1700" b="0" i="0">
+                <a:solidFill>
+                  <a:srgbClr val="26231F"/>
                 </a:solidFill>
               </a:rPr>
-              <a:t>비 오면 우산이 필요한 길입니다</a:t>
-            </a:r>
-          </a:p>
-        </p:txBody>
-      </p:sp>
-      <p:sp>
-        <p:nvSpPr>
-          <p:cNvPr id="5" name="안내 문구"/>
+              <a:t>정문까지 걸어서 이 분 거리입니다</a:t>
+            </a:r>
+          </a:p>
+        </p:txBody>
+      </p:sp>
+      <p:sp>
+        <p:nvSpPr>
+          <p:cNvPr id="7" name="안내 문구"/>
           <p:cNvSpPr txBox="1"/>
           <p:nvPr/>
         </p:nvSpPr>
         <p:spPr>
           <a:xfrm>
-            <a:off x="853418" y="4617720"/>
-            <a:ext cx="6095847" cy="914400"/>
+            <a:off x="6827349" y="4754880"/>
+            <a:ext cx="4632844" cy="914400"/>
           </a:xfrm>
           <a:prstGeom prst="rect">
             <a:avLst/>
@@ -3423,7 +3517,7 @@
             <a:r>
               <a:rPr sz="1400" b="0" i="0">
                 <a:solidFill>
-                  <a:srgbClr val="666666"/>
+                  <a:srgbClr val="26231F"/>
                 </a:solidFill>
               </a:rPr>
               <a:t>신랑 이름 ♥ 신부 이름</a:t>
@@ -3438,10 +3532,10 @@
             <a:r>
               <a:rPr sz="1400" b="0" i="0">
                 <a:solidFill>
-                  <a:srgbClr val="666666"/>
+                  <a:srgbClr val="26231F"/>
                 </a:solidFill>
               </a:rPr>
-              <a:t>2027. 00. 00 · 예식장 이름</a:t>
+              <a:t>날짜 입력 · 예식장 이름</a:t>
             </a:r>
           </a:p>
         </p:txBody>
@@ -3460,7 +3554,7 @@
     <p:bg>
       <p:bgPr>
         <a:solidFill>
-          <a:srgbClr val="EEFBFC"/>
+          <a:srgbClr val="D1F7FA"/>
         </a:solidFill>
         <a:effectLst/>
       </p:bgPr>
@@ -3474,77 +3568,77 @@
       <p:grpSpPr/>
       <p:sp>
         <p:nvSpPr>
-          <p:cNvPr id="3" name="장식"/>
+          <p:cNvPr id="3" name="포인트"/>
           <p:cNvSpPr/>
           <p:nvPr/>
         </p:nvSpPr>
         <p:spPr>
           <a:xfrm>
-            <a:off x="256032" y="256032"/>
-            <a:ext cx="11679631" cy="6345936"/>
+            <a:off x="5958687" y="246888"/>
+            <a:ext cx="274320" cy="274320"/>
+          </a:xfrm>
+          <a:prstGeom prst="heart">
+            <a:avLst/>
+          </a:prstGeom>
+          <a:solidFill>
+            <a:srgbClr val="7BE0EA"/>
+          </a:solidFill>
+          <a:ln>
+            <a:noFill/>
+          </a:ln>
+        </p:spPr>
+        <p:txBody>
+          <a:bodyPr rtlCol="0" anchor="ctr"/>
+          <a:lstStyle/>
+          <a:p>
+            <a:pPr algn="ctr"/>
+          </a:p>
+        </p:txBody>
+      </p:sp>
+      <p:sp>
+        <p:nvSpPr>
+          <p:cNvPr id="4" name="장식"/>
+          <p:cNvSpPr/>
+          <p:nvPr/>
+        </p:nvSpPr>
+        <p:spPr>
+          <a:xfrm>
+            <a:off x="5684367" y="1572768"/>
+            <a:ext cx="822960" cy="22860"/>
+          </a:xfrm>
+          <a:prstGeom prst="rect">
+            <a:avLst/>
+          </a:prstGeom>
+          <a:solidFill>
+            <a:srgbClr val="7BE0EA"/>
+          </a:solidFill>
+          <a:ln>
+            <a:noFill/>
+          </a:ln>
+        </p:spPr>
+        <p:txBody>
+          <a:bodyPr rtlCol="0" anchor="ctr"/>
+          <a:lstStyle/>
+          <a:p>
+            <a:pPr algn="ctr"/>
+          </a:p>
+        </p:txBody>
+      </p:sp>
+      <p:sp>
+        <p:nvSpPr>
+          <p:cNvPr id="5" name="상단 라벨"/>
+          <p:cNvSpPr txBox="1"/>
+          <p:nvPr/>
+        </p:nvSpPr>
+        <p:spPr>
+          <a:xfrm>
+            <a:off x="640080" y="182880"/>
+            <a:ext cx="3657600" cy="274320"/>
           </a:xfrm>
           <a:prstGeom prst="rect">
             <a:avLst/>
           </a:prstGeom>
           <a:noFill/>
-          <a:ln w="28575">
-            <a:solidFill>
-              <a:srgbClr val="26B8C5"/>
-            </a:solidFill>
-          </a:ln>
-        </p:spPr>
-        <p:txBody>
-          <a:bodyPr rtlCol="0" anchor="ctr"/>
-          <a:lstStyle/>
-          <a:p>
-            <a:pPr algn="ctr"/>
-          </a:p>
-        </p:txBody>
-      </p:sp>
-      <p:sp>
-        <p:nvSpPr>
-          <p:cNvPr id="4" name="장식"/>
-          <p:cNvSpPr/>
-          <p:nvPr/>
-        </p:nvSpPr>
-        <p:spPr>
-          <a:xfrm>
-            <a:off x="384048" y="384048"/>
-            <a:ext cx="11423599" cy="6089904"/>
-          </a:xfrm>
-          <a:prstGeom prst="rect">
-            <a:avLst/>
-          </a:prstGeom>
-          <a:noFill/>
-          <a:ln w="9525">
-            <a:solidFill>
-              <a:srgbClr val="D1F7FA"/>
-            </a:solidFill>
-          </a:ln>
-        </p:spPr>
-        <p:txBody>
-          <a:bodyPr rtlCol="0" anchor="ctr"/>
-          <a:lstStyle/>
-          <a:p>
-            <a:pPr algn="ctr"/>
-          </a:p>
-        </p:txBody>
-      </p:sp>
-      <p:sp>
-        <p:nvSpPr>
-          <p:cNvPr id="2" name="Title 1"/>
-          <p:cNvSpPr>
-            <a:spLocks noGrp="1"/>
-          </p:cNvSpPr>
-          <p:nvPr>
-            <p:ph type="title"/>
-          </p:nvPr>
-        </p:nvSpPr>
-        <p:spPr>
-          <a:xfrm>
-            <a:off x="822960" y="548640"/>
-            <a:ext cx="9265615" cy="822960"/>
-          </a:xfrm>
         </p:spPr>
         <p:txBody>
           <a:bodyPr wrap="square" lIns="54864" rIns="54864" tIns="27432" bIns="27432" anchor="ctr">
@@ -3553,6 +3647,44 @@
           <a:lstStyle/>
           <a:p>
             <a:pPr algn="l">
+              <a:lnSpc>
+                <a:spcPct val="115000"/>
+              </a:lnSpc>
+            </a:pPr>
+            <a:r>
+              <a:rPr sz="800" b="1" i="0" spc="250">
+                <a:solidFill>
+                  <a:srgbClr val="8E8780"/>
+                </a:solidFill>
+              </a:rPr>
+              <a:t>WEDDING</a:t>
+            </a:r>
+          </a:p>
+        </p:txBody>
+      </p:sp>
+      <p:sp>
+        <p:nvSpPr>
+          <p:cNvPr id="2" name="Title 1"/>
+          <p:cNvSpPr>
+            <a:spLocks noGrp="1"/>
+          </p:cNvSpPr>
+          <p:nvPr>
+            <p:ph type="title"/>
+          </p:nvPr>
+        </p:nvSpPr>
+        <p:spPr>
+          <a:xfrm>
+            <a:off x="1371600" y="640080"/>
+            <a:ext cx="9448495" cy="868680"/>
+          </a:xfrm>
+        </p:spPr>
+        <p:txBody>
+          <a:bodyPr wrap="square" lIns="54864" rIns="54864" tIns="27432" bIns="27432" anchor="ctr">
+            <a:noAutofit/>
+          </a:bodyPr>
+          <a:lstStyle/>
+          <a:p>
+            <a:pPr algn="ctr">
               <a:lnSpc>
                 <a:spcPct val="105000"/>
               </a:lnSpc>
@@ -3560,7 +3692,7 @@
             <a:r>
               <a:rPr sz="3000" b="1" i="0">
                 <a:solidFill>
-                  <a:srgbClr val="11595F"/>
+                  <a:srgbClr val="26231F"/>
                 </a:solidFill>
               </a:rPr>
               <a:t>신랑 · 신부 소개</a:t>
@@ -3570,14 +3702,14 @@
       </p:sp>
       <p:sp>
         <p:nvSpPr>
-          <p:cNvPr id="5" name="사진 자리"/>
+          <p:cNvPr id="6" name="사진 자리"/>
           <p:cNvSpPr/>
           <p:nvPr/>
         </p:nvSpPr>
         <p:spPr>
           <a:xfrm>
-            <a:off x="2076373" y="1554480"/>
-            <a:ext cx="2308860" cy="2308860"/>
+            <a:off x="1996363" y="1783080"/>
+            <a:ext cx="2286000" cy="2286000"/>
           </a:xfrm>
           <a:prstGeom prst="ellipse">
             <a:avLst/>
@@ -3586,9 +3718,7 @@
             <a:srgbClr val="D1F7FA"/>
           </a:solidFill>
           <a:ln w="19050">
-            <a:solidFill>
-              <a:srgbClr val="26B8C5"/>
-            </a:solidFill>
+            <a:noFill/>
             <a:prstDash val="dash"/>
           </a:ln>
         </p:spPr>
@@ -3606,7 +3736,7 @@
             <a:r>
               <a:rPr sz="1200" b="0" i="0">
                 <a:solidFill>
-                  <a:srgbClr val="11595F"/>
+                  <a:srgbClr val="8E8780"/>
                 </a:solidFill>
               </a:rPr>
               <a:t>사진</a:t>
@@ -3616,14 +3746,14 @@
       </p:sp>
       <p:sp>
         <p:nvSpPr>
-          <p:cNvPr id="6" name="TextBox 5"/>
+          <p:cNvPr id="7" name="TextBox 6"/>
           <p:cNvSpPr txBox="1"/>
           <p:nvPr/>
         </p:nvSpPr>
         <p:spPr>
           <a:xfrm>
-            <a:off x="822960" y="3954779"/>
-            <a:ext cx="4815687" cy="411480"/>
+            <a:off x="640080" y="4160520"/>
+            <a:ext cx="4998567" cy="411480"/>
           </a:xfrm>
           <a:prstGeom prst="rect">
             <a:avLst/>
@@ -3644,7 +3774,7 @@
             <a:r>
               <a:rPr sz="1600" b="1" i="0">
                 <a:solidFill>
-                  <a:srgbClr val="11595F"/>
+                  <a:srgbClr val="274649"/>
                 </a:solidFill>
               </a:rPr>
               <a:t>신랑</a:t>
@@ -3654,14 +3784,14 @@
       </p:sp>
       <p:sp>
         <p:nvSpPr>
-          <p:cNvPr id="7" name="TextBox 6"/>
+          <p:cNvPr id="8" name="TextBox 7"/>
           <p:cNvSpPr txBox="1"/>
           <p:nvPr/>
         </p:nvSpPr>
         <p:spPr>
           <a:xfrm>
-            <a:off x="914400" y="4411979"/>
-            <a:ext cx="4632807" cy="1760219"/>
+            <a:off x="731519" y="4617720"/>
+            <a:ext cx="4815687" cy="1737360"/>
           </a:xfrm>
           <a:prstGeom prst="rect">
             <a:avLst/>
@@ -3722,14 +3852,14 @@
       </p:sp>
       <p:sp>
         <p:nvSpPr>
-          <p:cNvPr id="8" name="사진 자리"/>
+          <p:cNvPr id="9" name="사진 자리"/>
           <p:cNvSpPr/>
           <p:nvPr/>
         </p:nvSpPr>
         <p:spPr>
           <a:xfrm>
-            <a:off x="7806461" y="1554480"/>
-            <a:ext cx="2308860" cy="2308860"/>
+            <a:off x="7909331" y="1783080"/>
+            <a:ext cx="2286000" cy="2286000"/>
           </a:xfrm>
           <a:prstGeom prst="ellipse">
             <a:avLst/>
@@ -3738,9 +3868,7 @@
             <a:srgbClr val="D1F7FA"/>
           </a:solidFill>
           <a:ln w="19050">
-            <a:solidFill>
-              <a:srgbClr val="26B8C5"/>
-            </a:solidFill>
+            <a:noFill/>
             <a:prstDash val="dash"/>
           </a:ln>
         </p:spPr>
@@ -3758,7 +3886,7 @@
             <a:r>
               <a:rPr sz="1200" b="0" i="0">
                 <a:solidFill>
-                  <a:srgbClr val="11595F"/>
+                  <a:srgbClr val="8E8780"/>
                 </a:solidFill>
               </a:rPr>
               <a:t>사진</a:t>
@@ -3768,14 +3896,14 @@
       </p:sp>
       <p:sp>
         <p:nvSpPr>
-          <p:cNvPr id="9" name="TextBox 8"/>
+          <p:cNvPr id="10" name="TextBox 9"/>
           <p:cNvSpPr txBox="1"/>
           <p:nvPr/>
         </p:nvSpPr>
         <p:spPr>
           <a:xfrm>
-            <a:off x="6553047" y="3954779"/>
-            <a:ext cx="4815687" cy="411480"/>
+            <a:off x="6553047" y="4160520"/>
+            <a:ext cx="4998567" cy="411480"/>
           </a:xfrm>
           <a:prstGeom prst="rect">
             <a:avLst/>
@@ -3796,7 +3924,7 @@
             <a:r>
               <a:rPr sz="1600" b="1" i="0">
                 <a:solidFill>
-                  <a:srgbClr val="11595F"/>
+                  <a:srgbClr val="274649"/>
                 </a:solidFill>
               </a:rPr>
               <a:t>신부</a:t>
@@ -3806,14 +3934,14 @@
       </p:sp>
       <p:sp>
         <p:nvSpPr>
-          <p:cNvPr id="10" name="TextBox 9"/>
+          <p:cNvPr id="11" name="TextBox 10"/>
           <p:cNvSpPr txBox="1"/>
           <p:nvPr/>
         </p:nvSpPr>
         <p:spPr>
           <a:xfrm>
-            <a:off x="6644487" y="4411979"/>
-            <a:ext cx="4632807" cy="1760219"/>
+            <a:off x="6644487" y="4617720"/>
+            <a:ext cx="4815687" cy="1737360"/>
           </a:xfrm>
           <a:prstGeom prst="rect">
             <a:avLst/>
@@ -3886,7 +4014,7 @@
     <p:bg>
       <p:bgPr>
         <a:solidFill>
-          <a:srgbClr val="EEFBFC"/>
+          <a:srgbClr val="D1F7FA"/>
         </a:solidFill>
         <a:effectLst/>
       </p:bgPr>
@@ -3900,77 +4028,77 @@
       <p:grpSpPr/>
       <p:sp>
         <p:nvSpPr>
-          <p:cNvPr id="3" name="장식"/>
+          <p:cNvPr id="3" name="포인트"/>
           <p:cNvSpPr/>
           <p:nvPr/>
         </p:nvSpPr>
         <p:spPr>
           <a:xfrm>
-            <a:off x="256032" y="256032"/>
-            <a:ext cx="11679631" cy="6345936"/>
+            <a:off x="5958687" y="246888"/>
+            <a:ext cx="274320" cy="274320"/>
+          </a:xfrm>
+          <a:prstGeom prst="heart">
+            <a:avLst/>
+          </a:prstGeom>
+          <a:solidFill>
+            <a:srgbClr val="7BE0EA"/>
+          </a:solidFill>
+          <a:ln>
+            <a:noFill/>
+          </a:ln>
+        </p:spPr>
+        <p:txBody>
+          <a:bodyPr rtlCol="0" anchor="ctr"/>
+          <a:lstStyle/>
+          <a:p>
+            <a:pPr algn="ctr"/>
+          </a:p>
+        </p:txBody>
+      </p:sp>
+      <p:sp>
+        <p:nvSpPr>
+          <p:cNvPr id="4" name="장식"/>
+          <p:cNvSpPr/>
+          <p:nvPr/>
+        </p:nvSpPr>
+        <p:spPr>
+          <a:xfrm>
+            <a:off x="5684367" y="1572768"/>
+            <a:ext cx="822960" cy="22860"/>
+          </a:xfrm>
+          <a:prstGeom prst="rect">
+            <a:avLst/>
+          </a:prstGeom>
+          <a:solidFill>
+            <a:srgbClr val="7BE0EA"/>
+          </a:solidFill>
+          <a:ln>
+            <a:noFill/>
+          </a:ln>
+        </p:spPr>
+        <p:txBody>
+          <a:bodyPr rtlCol="0" anchor="ctr"/>
+          <a:lstStyle/>
+          <a:p>
+            <a:pPr algn="ctr"/>
+          </a:p>
+        </p:txBody>
+      </p:sp>
+      <p:sp>
+        <p:nvSpPr>
+          <p:cNvPr id="5" name="상단 라벨"/>
+          <p:cNvSpPr txBox="1"/>
+          <p:nvPr/>
+        </p:nvSpPr>
+        <p:spPr>
+          <a:xfrm>
+            <a:off x="640080" y="182880"/>
+            <a:ext cx="3657600" cy="274320"/>
           </a:xfrm>
           <a:prstGeom prst="rect">
             <a:avLst/>
           </a:prstGeom>
           <a:noFill/>
-          <a:ln w="28575">
-            <a:solidFill>
-              <a:srgbClr val="26B8C5"/>
-            </a:solidFill>
-          </a:ln>
-        </p:spPr>
-        <p:txBody>
-          <a:bodyPr rtlCol="0" anchor="ctr"/>
-          <a:lstStyle/>
-          <a:p>
-            <a:pPr algn="ctr"/>
-          </a:p>
-        </p:txBody>
-      </p:sp>
-      <p:sp>
-        <p:nvSpPr>
-          <p:cNvPr id="4" name="장식"/>
-          <p:cNvSpPr/>
-          <p:nvPr/>
-        </p:nvSpPr>
-        <p:spPr>
-          <a:xfrm>
-            <a:off x="384048" y="384048"/>
-            <a:ext cx="11423599" cy="6089904"/>
-          </a:xfrm>
-          <a:prstGeom prst="rect">
-            <a:avLst/>
-          </a:prstGeom>
-          <a:noFill/>
-          <a:ln w="9525">
-            <a:solidFill>
-              <a:srgbClr val="D1F7FA"/>
-            </a:solidFill>
-          </a:ln>
-        </p:spPr>
-        <p:txBody>
-          <a:bodyPr rtlCol="0" anchor="ctr"/>
-          <a:lstStyle/>
-          <a:p>
-            <a:pPr algn="ctr"/>
-          </a:p>
-        </p:txBody>
-      </p:sp>
-      <p:sp>
-        <p:nvSpPr>
-          <p:cNvPr id="2" name="Title 1"/>
-          <p:cNvSpPr>
-            <a:spLocks noGrp="1"/>
-          </p:cNvSpPr>
-          <p:nvPr>
-            <p:ph type="title"/>
-          </p:nvPr>
-        </p:nvSpPr>
-        <p:spPr>
-          <a:xfrm>
-            <a:off x="822960" y="548640"/>
-            <a:ext cx="9265615" cy="822960"/>
-          </a:xfrm>
         </p:spPr>
         <p:txBody>
           <a:bodyPr wrap="square" lIns="54864" rIns="54864" tIns="27432" bIns="27432" anchor="ctr">
@@ -3979,6 +4107,44 @@
           <a:lstStyle/>
           <a:p>
             <a:pPr algn="l">
+              <a:lnSpc>
+                <a:spcPct val="115000"/>
+              </a:lnSpc>
+            </a:pPr>
+            <a:r>
+              <a:rPr sz="800" b="1" i="0" spc="250">
+                <a:solidFill>
+                  <a:srgbClr val="8E8780"/>
+                </a:solidFill>
+              </a:rPr>
+              <a:t>WEDDING</a:t>
+            </a:r>
+          </a:p>
+        </p:txBody>
+      </p:sp>
+      <p:sp>
+        <p:nvSpPr>
+          <p:cNvPr id="2" name="Title 1"/>
+          <p:cNvSpPr>
+            <a:spLocks noGrp="1"/>
+          </p:cNvSpPr>
+          <p:nvPr>
+            <p:ph type="title"/>
+          </p:nvPr>
+        </p:nvSpPr>
+        <p:spPr>
+          <a:xfrm>
+            <a:off x="1371600" y="640080"/>
+            <a:ext cx="9448495" cy="868680"/>
+          </a:xfrm>
+        </p:spPr>
+        <p:txBody>
+          <a:bodyPr wrap="square" lIns="54864" rIns="54864" tIns="27432" bIns="27432" anchor="ctr">
+            <a:noAutofit/>
+          </a:bodyPr>
+          <a:lstStyle/>
+          <a:p>
+            <a:pPr algn="ctr">
               <a:lnSpc>
                 <a:spcPct val="105000"/>
               </a:lnSpc>
@@ -3986,7 +4152,7 @@
             <a:r>
               <a:rPr sz="3000" b="1" i="0">
                 <a:solidFill>
-                  <a:srgbClr val="11595F"/>
+                  <a:srgbClr val="26231F"/>
                 </a:solidFill>
               </a:rPr>
               <a:t>오시는 길</a:t>
@@ -3996,14 +4162,14 @@
       </p:sp>
       <p:sp>
         <p:nvSpPr>
-          <p:cNvPr id="5" name="사진 자리"/>
+          <p:cNvPr id="6" name="사진 자리"/>
           <p:cNvSpPr/>
           <p:nvPr/>
         </p:nvSpPr>
         <p:spPr>
           <a:xfrm>
-            <a:off x="822960" y="1554480"/>
-            <a:ext cx="6035040" cy="4617720"/>
+            <a:off x="640080" y="1783080"/>
+            <a:ext cx="6035040" cy="4572000"/>
           </a:xfrm>
           <a:prstGeom prst="roundRect">
             <a:avLst>
@@ -4014,9 +4180,7 @@
             <a:srgbClr val="D1F7FA"/>
           </a:solidFill>
           <a:ln w="19050">
-            <a:solidFill>
-              <a:srgbClr val="26B8C5"/>
-            </a:solidFill>
+            <a:noFill/>
             <a:prstDash val="dash"/>
           </a:ln>
         </p:spPr>
@@ -4034,7 +4198,7 @@
             <a:r>
               <a:rPr sz="1400" b="0" i="0">
                 <a:solidFill>
-                  <a:srgbClr val="11595F"/>
+                  <a:srgbClr val="8E8780"/>
                 </a:solidFill>
               </a:rPr>
               <a:t>약도 · 지도를 넣어 주세요</a:t>
@@ -4044,15 +4208,15 @@
       </p:sp>
       <p:graphicFrame>
         <p:nvGraphicFramePr>
-          <p:cNvPr id="6" name="표"/>
+          <p:cNvPr id="7" name="표"/>
           <p:cNvGraphicFramePr>
             <a:graphicFrameLocks noGrp="1"/>
           </p:cNvGraphicFramePr>
           <p:nvPr/>
         </p:nvGraphicFramePr>
         <p:xfrm>
-          <a:off x="7223760" y="1554480"/>
-          <a:ext cx="4144975" cy="3291840"/>
+          <a:off x="7040880" y="1783080"/>
+          <a:ext cx="4510735" cy="3291840"/>
         </p:xfrm>
         <a:graphic>
           <a:graphicData uri="http://schemas.openxmlformats.org/drawingml/2006/table">
@@ -4062,7 +4226,7 @@
               </a:tblPr>
               <a:tblGrid>
                 <a:gridCol w="1371600"/>
-                <a:gridCol w="2773375"/>
+                <a:gridCol w="3139135"/>
               </a:tblGrid>
               <a:tr h="822960">
                 <a:tc>
@@ -4074,7 +4238,7 @@
                       <a:r>
                         <a:rPr sz="1400" b="1">
                           <a:solidFill>
-                            <a:srgbClr val="11595F"/>
+                            <a:srgbClr val="274649"/>
                           </a:solidFill>
                         </a:rPr>
                         <a:t>예식장</a:t>
@@ -4120,7 +4284,7 @@
                       <a:r>
                         <a:rPr sz="1400" b="0">
                           <a:solidFill>
-                            <a:srgbClr val="2B2B2B"/>
+                            <a:srgbClr val="26231F"/>
                           </a:solidFill>
                         </a:rPr>
                         <a:t>입력하세요</a:t>
@@ -4153,7 +4317,7 @@
                       <a:prstDash val="solid"/>
                     </a:lnB>
                     <a:solidFill>
-                      <a:srgbClr val="EEFBFC"/>
+                      <a:srgbClr val="EAFBFD"/>
                     </a:solidFill>
                   </a:tcPr>
                 </a:tc>
@@ -4168,7 +4332,7 @@
                       <a:r>
                         <a:rPr sz="1400" b="1">
                           <a:solidFill>
-                            <a:srgbClr val="11595F"/>
+                            <a:srgbClr val="274649"/>
                           </a:solidFill>
                         </a:rPr>
                         <a:t>주소</a:t>
@@ -4214,7 +4378,7 @@
                       <a:r>
                         <a:rPr sz="1400" b="0">
                           <a:solidFill>
-                            <a:srgbClr val="2B2B2B"/>
+                            <a:srgbClr val="26231F"/>
                           </a:solidFill>
                         </a:rPr>
                         <a:t>입력하세요</a:t>
@@ -4262,7 +4426,7 @@
                       <a:r>
                         <a:rPr sz="1400" b="1">
                           <a:solidFill>
-                            <a:srgbClr val="11595F"/>
+                            <a:srgbClr val="274649"/>
                           </a:solidFill>
                         </a:rPr>
                         <a:t>일시</a:t>
@@ -4308,7 +4472,7 @@
                       <a:r>
                         <a:rPr sz="1400" b="0">
                           <a:solidFill>
-                            <a:srgbClr val="2B2B2B"/>
+                            <a:srgbClr val="26231F"/>
                           </a:solidFill>
                         </a:rPr>
                         <a:t>입력하세요</a:t>
@@ -4341,7 +4505,7 @@
                       <a:prstDash val="solid"/>
                     </a:lnB>
                     <a:solidFill>
-                      <a:srgbClr val="EEFBFC"/>
+                      <a:srgbClr val="EAFBFD"/>
                     </a:solidFill>
                   </a:tcPr>
                 </a:tc>
@@ -4356,7 +4520,7 @@
                       <a:r>
                         <a:rPr sz="1400" b="1">
                           <a:solidFill>
-                            <a:srgbClr val="11595F"/>
+                            <a:srgbClr val="274649"/>
                           </a:solidFill>
                         </a:rPr>
                         <a:t>연락처</a:t>
@@ -4402,7 +4566,7 @@
                       <a:r>
                         <a:rPr sz="1400" b="0">
                           <a:solidFill>
-                            <a:srgbClr val="2B2B2B"/>
+                            <a:srgbClr val="26231F"/>
                           </a:solidFill>
                         </a:rPr>
                         <a:t>입력하세요</a:t>
@@ -4458,7 +4622,7 @@
     <p:bg>
       <p:bgPr>
         <a:solidFill>
-          <a:srgbClr val="EEFBFC"/>
+          <a:srgbClr val="D1F7FA"/>
         </a:solidFill>
         <a:effectLst/>
       </p:bgPr>
@@ -4472,186 +4636,72 @@
       <p:grpSpPr/>
       <p:sp>
         <p:nvSpPr>
-          <p:cNvPr id="3" name="장식"/>
+          <p:cNvPr id="3" name="포인트"/>
           <p:cNvSpPr/>
           <p:nvPr/>
         </p:nvSpPr>
         <p:spPr>
           <a:xfrm>
-            <a:off x="256032" y="256032"/>
-            <a:ext cx="11679631" cy="6345936"/>
-          </a:xfrm>
-          <a:prstGeom prst="rect">
-            <a:avLst/>
-          </a:prstGeom>
-          <a:noFill/>
-          <a:ln w="28575">
-            <a:solidFill>
-              <a:srgbClr val="26B8C5"/>
-            </a:solidFill>
-          </a:ln>
-        </p:spPr>
-        <p:txBody>
-          <a:bodyPr rtlCol="0" anchor="ctr"/>
-          <a:lstStyle/>
-          <a:p>
-            <a:pPr algn="ctr"/>
-          </a:p>
-        </p:txBody>
-      </p:sp>
-      <p:sp>
-        <p:nvSpPr>
-          <p:cNvPr id="4" name="장식"/>
-          <p:cNvSpPr/>
-          <p:nvPr/>
-        </p:nvSpPr>
-        <p:spPr>
-          <a:xfrm>
-            <a:off x="384048" y="384048"/>
-            <a:ext cx="11423599" cy="6089904"/>
-          </a:xfrm>
-          <a:prstGeom prst="rect">
-            <a:avLst/>
-          </a:prstGeom>
-          <a:noFill/>
-          <a:ln w="9525">
-            <a:solidFill>
-              <a:srgbClr val="D1F7FA"/>
-            </a:solidFill>
-          </a:ln>
-        </p:spPr>
-        <p:txBody>
-          <a:bodyPr rtlCol="0" anchor="ctr"/>
-          <a:lstStyle/>
-          <a:p>
-            <a:pPr algn="ctr"/>
-          </a:p>
-        </p:txBody>
-      </p:sp>
-      <p:sp>
-        <p:nvSpPr>
-          <p:cNvPr id="2" name="Title 1"/>
-          <p:cNvSpPr>
-            <a:spLocks noGrp="1"/>
-          </p:cNvSpPr>
-          <p:nvPr>
-            <p:ph type="title"/>
-          </p:nvPr>
-        </p:nvSpPr>
-        <p:spPr>
-          <a:xfrm>
-            <a:off x="822960" y="548640"/>
-            <a:ext cx="9265615" cy="822960"/>
-          </a:xfrm>
-        </p:spPr>
-        <p:txBody>
-          <a:bodyPr wrap="square" lIns="54864" rIns="54864" tIns="27432" bIns="27432" anchor="ctr">
-            <a:noAutofit/>
-          </a:bodyPr>
-          <a:lstStyle/>
-          <a:p>
-            <a:pPr algn="l">
-              <a:lnSpc>
-                <a:spcPct val="105000"/>
-              </a:lnSpc>
-            </a:pPr>
-            <a:r>
-              <a:rPr sz="3000" b="1" i="0">
-                <a:solidFill>
-                  <a:srgbClr val="11595F"/>
-                </a:solidFill>
-              </a:rPr>
-              <a:t>교통 안내</a:t>
-            </a:r>
-          </a:p>
-        </p:txBody>
-      </p:sp>
-      <p:sp>
-        <p:nvSpPr>
-          <p:cNvPr id="5" name="카드 1"/>
-          <p:cNvSpPr/>
-          <p:nvPr/>
-        </p:nvSpPr>
-        <p:spPr>
-          <a:xfrm>
-            <a:off x="822960" y="1554480"/>
-            <a:ext cx="3362858" cy="4617720"/>
-          </a:xfrm>
-          <a:prstGeom prst="roundRect">
-            <a:avLst>
-              <a:gd name="adj" fmla="val 8000"/>
-            </a:avLst>
-          </a:prstGeom>
-          <a:solidFill>
-            <a:srgbClr val="EEFBFC"/>
-          </a:solidFill>
-          <a:ln w="15875">
-            <a:solidFill>
-              <a:srgbClr val="D1F7FA"/>
-            </a:solidFill>
-          </a:ln>
-        </p:spPr>
-        <p:txBody>
-          <a:bodyPr rtlCol="0" anchor="ctr"/>
-          <a:lstStyle/>
-          <a:p>
-            <a:pPr algn="ctr"/>
-          </a:p>
-        </p:txBody>
-      </p:sp>
-      <p:sp>
-        <p:nvSpPr>
-          <p:cNvPr id="6" name="번호 1"/>
-          <p:cNvSpPr/>
-          <p:nvPr/>
-        </p:nvSpPr>
-        <p:spPr>
-          <a:xfrm>
-            <a:off x="1005840" y="1737360"/>
-            <a:ext cx="457200" cy="457200"/>
-          </a:xfrm>
-          <a:prstGeom prst="ellipse">
+            <a:off x="5958687" y="246888"/>
+            <a:ext cx="274320" cy="274320"/>
+          </a:xfrm>
+          <a:prstGeom prst="heart">
             <a:avLst/>
           </a:prstGeom>
           <a:solidFill>
-            <a:srgbClr val="26B8C5"/>
+            <a:srgbClr val="7BE0EA"/>
           </a:solidFill>
           <a:ln>
             <a:noFill/>
           </a:ln>
         </p:spPr>
         <p:txBody>
-          <a:bodyPr rtlCol="0" anchor="ctr" wrap="square" lIns="54864" rIns="54864" tIns="27432" bIns="27432">
-            <a:noAutofit/>
-          </a:bodyPr>
-          <a:lstStyle/>
-          <a:p>
-            <a:pPr algn="ctr">
-              <a:lnSpc>
-                <a:spcPct val="100000"/>
-              </a:lnSpc>
-            </a:pPr>
-            <a:r>
-              <a:rPr sz="1600" b="1" i="0">
-                <a:solidFill>
-                  <a:srgbClr val="FFFFFF"/>
-                </a:solidFill>
-              </a:rPr>
-              <a:t>1</a:t>
-            </a:r>
-          </a:p>
-        </p:txBody>
-      </p:sp>
-      <p:sp>
-        <p:nvSpPr>
-          <p:cNvPr id="7" name="TextBox 6"/>
+          <a:bodyPr rtlCol="0" anchor="ctr"/>
+          <a:lstStyle/>
+          <a:p>
+            <a:pPr algn="ctr"/>
+          </a:p>
+        </p:txBody>
+      </p:sp>
+      <p:sp>
+        <p:nvSpPr>
+          <p:cNvPr id="4" name="장식"/>
+          <p:cNvSpPr/>
+          <p:nvPr/>
+        </p:nvSpPr>
+        <p:spPr>
+          <a:xfrm>
+            <a:off x="5684367" y="1572768"/>
+            <a:ext cx="822960" cy="22860"/>
+          </a:xfrm>
+          <a:prstGeom prst="rect">
+            <a:avLst/>
+          </a:prstGeom>
+          <a:solidFill>
+            <a:srgbClr val="7BE0EA"/>
+          </a:solidFill>
+          <a:ln>
+            <a:noFill/>
+          </a:ln>
+        </p:spPr>
+        <p:txBody>
+          <a:bodyPr rtlCol="0" anchor="ctr"/>
+          <a:lstStyle/>
+          <a:p>
+            <a:pPr algn="ctr"/>
+          </a:p>
+        </p:txBody>
+      </p:sp>
+      <p:sp>
+        <p:nvSpPr>
+          <p:cNvPr id="5" name="상단 라벨"/>
           <p:cNvSpPr txBox="1"/>
           <p:nvPr/>
         </p:nvSpPr>
         <p:spPr>
           <a:xfrm>
-            <a:off x="960120" y="2331720"/>
-            <a:ext cx="3088538" cy="640080"/>
+            <a:off x="640080" y="182880"/>
+            <a:ext cx="3657600" cy="274320"/>
           </a:xfrm>
           <a:prstGeom prst="rect">
             <a:avLst/>
@@ -4670,12 +4720,121 @@
               </a:lnSpc>
             </a:pPr>
             <a:r>
-              <a:rPr sz="1800" b="1" i="0">
-                <a:solidFill>
-                  <a:srgbClr val="11595F"/>
+              <a:rPr sz="800" b="1" i="0" spc="250">
+                <a:solidFill>
+                  <a:srgbClr val="8E8780"/>
                 </a:solidFill>
               </a:rPr>
-              <a:t>지하철</a:t>
+              <a:t>WEDDING</a:t>
+            </a:r>
+          </a:p>
+        </p:txBody>
+      </p:sp>
+      <p:sp>
+        <p:nvSpPr>
+          <p:cNvPr id="2" name="Title 1"/>
+          <p:cNvSpPr>
+            <a:spLocks noGrp="1"/>
+          </p:cNvSpPr>
+          <p:nvPr>
+            <p:ph type="title"/>
+          </p:nvPr>
+        </p:nvSpPr>
+        <p:spPr>
+          <a:xfrm>
+            <a:off x="1371600" y="640080"/>
+            <a:ext cx="9448495" cy="868680"/>
+          </a:xfrm>
+        </p:spPr>
+        <p:txBody>
+          <a:bodyPr wrap="square" lIns="54864" rIns="54864" tIns="27432" bIns="27432" anchor="ctr">
+            <a:noAutofit/>
+          </a:bodyPr>
+          <a:lstStyle/>
+          <a:p>
+            <a:pPr algn="ctr">
+              <a:lnSpc>
+                <a:spcPct val="105000"/>
+              </a:lnSpc>
+            </a:pPr>
+            <a:r>
+              <a:rPr sz="3000" b="1" i="0">
+                <a:solidFill>
+                  <a:srgbClr val="26231F"/>
+                </a:solidFill>
+              </a:rPr>
+              <a:t>교통 안내</a:t>
+            </a:r>
+          </a:p>
+        </p:txBody>
+      </p:sp>
+      <p:sp>
+        <p:nvSpPr>
+          <p:cNvPr id="6" name="카드 1"/>
+          <p:cNvSpPr/>
+          <p:nvPr/>
+        </p:nvSpPr>
+        <p:spPr>
+          <a:xfrm>
+            <a:off x="640080" y="1783080"/>
+            <a:ext cx="3484778" cy="4572000"/>
+          </a:xfrm>
+          <a:prstGeom prst="roundRect">
+            <a:avLst>
+              <a:gd name="adj" fmla="val 7000"/>
+            </a:avLst>
+          </a:prstGeom>
+          <a:solidFill>
+            <a:srgbClr val="FFFFFF"/>
+          </a:solidFill>
+          <a:ln w="12700">
+            <a:solidFill>
+              <a:srgbClr val="A5EDF3"/>
+            </a:solidFill>
+          </a:ln>
+        </p:spPr>
+        <p:txBody>
+          <a:bodyPr rtlCol="0" anchor="ctr"/>
+          <a:lstStyle/>
+          <a:p>
+            <a:pPr algn="ctr"/>
+          </a:p>
+        </p:txBody>
+      </p:sp>
+      <p:sp>
+        <p:nvSpPr>
+          <p:cNvPr id="7" name="번호 1"/>
+          <p:cNvSpPr txBox="1"/>
+          <p:nvPr/>
+        </p:nvSpPr>
+        <p:spPr>
+          <a:xfrm>
+            <a:off x="731519" y="1920240"/>
+            <a:ext cx="914400" cy="548640"/>
+          </a:xfrm>
+          <a:prstGeom prst="rect">
+            <a:avLst/>
+          </a:prstGeom>
+          <a:noFill/>
+        </p:spPr>
+        <p:txBody>
+          <a:bodyPr wrap="square" lIns="54864" rIns="54864" tIns="27432" bIns="27432" anchor="ctr">
+            <a:noAutofit/>
+          </a:bodyPr>
+          <a:lstStyle/>
+          <a:p>
+            <a:pPr algn="l">
+              <a:lnSpc>
+                <a:spcPct val="115000"/>
+              </a:lnSpc>
+            </a:pPr>
+            <a:r>
+              <a:rPr sz="2400" b="1" i="0">
+                <a:solidFill>
+                  <a:srgbClr val="7BE0EA"/>
+                </a:solidFill>
+              </a:rPr>
+              <a:t>01</a:t>
             </a:r>
           </a:p>
         </p:txBody>
@@ -4688,8 +4847,46 @@
         </p:nvSpPr>
         <p:spPr>
           <a:xfrm>
-            <a:off x="960120" y="3017520"/>
-            <a:ext cx="3088538" cy="3017520"/>
+            <a:off x="777240" y="2560320"/>
+            <a:ext cx="3210458" cy="640080"/>
+          </a:xfrm>
+          <a:prstGeom prst="rect">
+            <a:avLst/>
+          </a:prstGeom>
+          <a:noFill/>
+        </p:spPr>
+        <p:txBody>
+          <a:bodyPr wrap="square" lIns="54864" rIns="54864" tIns="27432" bIns="27432" anchor="ctr">
+            <a:noAutofit/>
+          </a:bodyPr>
+          <a:lstStyle/>
+          <a:p>
+            <a:pPr algn="l">
+              <a:lnSpc>
+                <a:spcPct val="115000"/>
+              </a:lnSpc>
+            </a:pPr>
+            <a:r>
+              <a:rPr sz="1800" b="1" i="0">
+                <a:solidFill>
+                  <a:srgbClr val="274649"/>
+                </a:solidFill>
+              </a:rPr>
+              <a:t>지하철</a:t>
+            </a:r>
+          </a:p>
+        </p:txBody>
+      </p:sp>
+      <p:sp>
+        <p:nvSpPr>
+          <p:cNvPr id="9" name="TextBox 8"/>
+          <p:cNvSpPr txBox="1"/>
+          <p:nvPr/>
+        </p:nvSpPr>
+        <p:spPr>
+          <a:xfrm>
+            <a:off x="777240" y="3246120"/>
+            <a:ext cx="3210458" cy="2971800"/>
           </a:xfrm>
           <a:prstGeom prst="rect">
             <a:avLst/>
@@ -4710,7 +4907,7 @@
             <a:r>
               <a:rPr sz="1500" b="0" i="0">
                 <a:solidFill>
-                  <a:srgbClr val="2B2B2B"/>
+                  <a:srgbClr val="26231F"/>
                 </a:solidFill>
               </a:rPr>
               <a:t>입력하세요</a:t>
@@ -4720,26 +4917,26 @@
       </p:sp>
       <p:sp>
         <p:nvSpPr>
-          <p:cNvPr id="9" name="카드 2"/>
+          <p:cNvPr id="10" name="카드 2"/>
           <p:cNvSpPr/>
           <p:nvPr/>
         </p:nvSpPr>
         <p:spPr>
           <a:xfrm>
-            <a:off x="4414418" y="1554480"/>
-            <a:ext cx="3362858" cy="4617720"/>
+            <a:off x="4353458" y="1783080"/>
+            <a:ext cx="3484778" cy="4572000"/>
           </a:xfrm>
           <a:prstGeom prst="roundRect">
             <a:avLst>
-              <a:gd name="adj" fmla="val 8000"/>
+              <a:gd name="adj" fmla="val 7000"/>
             </a:avLst>
           </a:prstGeom>
           <a:solidFill>
-            <a:srgbClr val="EEFBFC"/>
+            <a:srgbClr val="FFFFFF"/>
           </a:solidFill>
-          <a:ln w="15875">
+          <a:ln w="12700">
             <a:solidFill>
-              <a:srgbClr val="D1F7FA"/>
+              <a:srgbClr val="A5EDF3"/>
             </a:solidFill>
           </a:ln>
         </p:spPr>
@@ -4753,57 +4950,14 @@
       </p:sp>
       <p:sp>
         <p:nvSpPr>
-          <p:cNvPr id="10" name="번호 2"/>
-          <p:cNvSpPr/>
-          <p:nvPr/>
-        </p:nvSpPr>
-        <p:spPr>
-          <a:xfrm>
-            <a:off x="4597298" y="1737360"/>
-            <a:ext cx="457200" cy="457200"/>
-          </a:xfrm>
-          <a:prstGeom prst="ellipse">
-            <a:avLst/>
-          </a:prstGeom>
-          <a:solidFill>
-            <a:srgbClr val="26B8C5"/>
-          </a:solidFill>
-          <a:ln>
-            <a:noFill/>
-          </a:ln>
-        </p:spPr>
-        <p:txBody>
-          <a:bodyPr rtlCol="0" anchor="ctr" wrap="square" lIns="54864" rIns="54864" tIns="27432" bIns="27432">
-            <a:noAutofit/>
-          </a:bodyPr>
-          <a:lstStyle/>
-          <a:p>
-            <a:pPr algn="ctr">
-              <a:lnSpc>
-                <a:spcPct val="100000"/>
-              </a:lnSpc>
-            </a:pPr>
-            <a:r>
-              <a:rPr sz="1600" b="1" i="0">
-                <a:solidFill>
-                  <a:srgbClr val="FFFFFF"/>
-                </a:solidFill>
-              </a:rPr>
-              <a:t>2</a:t>
-            </a:r>
-          </a:p>
-        </p:txBody>
-      </p:sp>
-      <p:sp>
-        <p:nvSpPr>
-          <p:cNvPr id="11" name="TextBox 10"/>
+          <p:cNvPr id="11" name="번호 2"/>
           <p:cNvSpPr txBox="1"/>
           <p:nvPr/>
         </p:nvSpPr>
         <p:spPr>
           <a:xfrm>
-            <a:off x="4551578" y="2331720"/>
-            <a:ext cx="3088538" cy="640080"/>
+            <a:off x="4444898" y="1920240"/>
+            <a:ext cx="914400" cy="548640"/>
           </a:xfrm>
           <a:prstGeom prst="rect">
             <a:avLst/>
@@ -4822,12 +4976,12 @@
               </a:lnSpc>
             </a:pPr>
             <a:r>
-              <a:rPr sz="1800" b="1" i="0">
-                <a:solidFill>
-                  <a:srgbClr val="11595F"/>
+              <a:rPr sz="2400" b="1" i="0">
+                <a:solidFill>
+                  <a:srgbClr val="7BE0EA"/>
                 </a:solidFill>
               </a:rPr>
-              <a:t>버스</a:t>
+              <a:t>02</a:t>
             </a:r>
           </a:p>
         </p:txBody>
@@ -4840,8 +4994,46 @@
         </p:nvSpPr>
         <p:spPr>
           <a:xfrm>
-            <a:off x="4551578" y="3017520"/>
-            <a:ext cx="3088538" cy="3017520"/>
+            <a:off x="4490618" y="2560320"/>
+            <a:ext cx="3210458" cy="640080"/>
+          </a:xfrm>
+          <a:prstGeom prst="rect">
+            <a:avLst/>
+          </a:prstGeom>
+          <a:noFill/>
+        </p:spPr>
+        <p:txBody>
+          <a:bodyPr wrap="square" lIns="54864" rIns="54864" tIns="27432" bIns="27432" anchor="ctr">
+            <a:noAutofit/>
+          </a:bodyPr>
+          <a:lstStyle/>
+          <a:p>
+            <a:pPr algn="l">
+              <a:lnSpc>
+                <a:spcPct val="115000"/>
+              </a:lnSpc>
+            </a:pPr>
+            <a:r>
+              <a:rPr sz="1800" b="1" i="0">
+                <a:solidFill>
+                  <a:srgbClr val="274649"/>
+                </a:solidFill>
+              </a:rPr>
+              <a:t>버스</a:t>
+            </a:r>
+          </a:p>
+        </p:txBody>
+      </p:sp>
+      <p:sp>
+        <p:nvSpPr>
+          <p:cNvPr id="13" name="TextBox 12"/>
+          <p:cNvSpPr txBox="1"/>
+          <p:nvPr/>
+        </p:nvSpPr>
+        <p:spPr>
+          <a:xfrm>
+            <a:off x="4490618" y="3246120"/>
+            <a:ext cx="3210458" cy="2971800"/>
           </a:xfrm>
           <a:prstGeom prst="rect">
             <a:avLst/>
@@ -4862,7 +5054,7 @@
             <a:r>
               <a:rPr sz="1500" b="0" i="0">
                 <a:solidFill>
-                  <a:srgbClr val="2B2B2B"/>
+                  <a:srgbClr val="26231F"/>
                 </a:solidFill>
               </a:rPr>
               <a:t>입력하세요</a:t>
@@ -4872,26 +5064,26 @@
       </p:sp>
       <p:sp>
         <p:nvSpPr>
-          <p:cNvPr id="13" name="카드 3"/>
+          <p:cNvPr id="14" name="카드 3"/>
           <p:cNvSpPr/>
           <p:nvPr/>
         </p:nvSpPr>
         <p:spPr>
           <a:xfrm>
-            <a:off x="8005876" y="1554480"/>
-            <a:ext cx="3362858" cy="4617720"/>
+            <a:off x="8066836" y="1783080"/>
+            <a:ext cx="3484778" cy="4572000"/>
           </a:xfrm>
           <a:prstGeom prst="roundRect">
             <a:avLst>
-              <a:gd name="adj" fmla="val 8000"/>
+              <a:gd name="adj" fmla="val 7000"/>
             </a:avLst>
           </a:prstGeom>
           <a:solidFill>
-            <a:srgbClr val="EEFBFC"/>
+            <a:srgbClr val="FFFFFF"/>
           </a:solidFill>
-          <a:ln w="15875">
+          <a:ln w="12700">
             <a:solidFill>
-              <a:srgbClr val="D1F7FA"/>
+              <a:srgbClr val="A5EDF3"/>
             </a:solidFill>
           </a:ln>
         </p:spPr>
@@ -4905,57 +5097,14 @@
       </p:sp>
       <p:sp>
         <p:nvSpPr>
-          <p:cNvPr id="14" name="번호 3"/>
-          <p:cNvSpPr/>
-          <p:nvPr/>
-        </p:nvSpPr>
-        <p:spPr>
-          <a:xfrm>
-            <a:off x="8188756" y="1737360"/>
-            <a:ext cx="457200" cy="457200"/>
-          </a:xfrm>
-          <a:prstGeom prst="ellipse">
-            <a:avLst/>
-          </a:prstGeom>
-          <a:solidFill>
-            <a:srgbClr val="26B8C5"/>
-          </a:solidFill>
-          <a:ln>
-            <a:noFill/>
-          </a:ln>
-        </p:spPr>
-        <p:txBody>
-          <a:bodyPr rtlCol="0" anchor="ctr" wrap="square" lIns="54864" rIns="54864" tIns="27432" bIns="27432">
-            <a:noAutofit/>
-          </a:bodyPr>
-          <a:lstStyle/>
-          <a:p>
-            <a:pPr algn="ctr">
-              <a:lnSpc>
-                <a:spcPct val="100000"/>
-              </a:lnSpc>
-            </a:pPr>
-            <a:r>
-              <a:rPr sz="1600" b="1" i="0">
-                <a:solidFill>
-                  <a:srgbClr val="FFFFFF"/>
-                </a:solidFill>
-              </a:rPr>
-              <a:t>3</a:t>
-            </a:r>
-          </a:p>
-        </p:txBody>
-      </p:sp>
-      <p:sp>
-        <p:nvSpPr>
-          <p:cNvPr id="15" name="TextBox 14"/>
+          <p:cNvPr id="15" name="번호 3"/>
           <p:cNvSpPr txBox="1"/>
           <p:nvPr/>
         </p:nvSpPr>
         <p:spPr>
           <a:xfrm>
-            <a:off x="8143036" y="2331720"/>
-            <a:ext cx="3088538" cy="640080"/>
+            <a:off x="8158276" y="1920240"/>
+            <a:ext cx="914400" cy="548640"/>
           </a:xfrm>
           <a:prstGeom prst="rect">
             <a:avLst/>
@@ -4974,12 +5123,12 @@
               </a:lnSpc>
             </a:pPr>
             <a:r>
-              <a:rPr sz="1800" b="1" i="0">
-                <a:solidFill>
-                  <a:srgbClr val="11595F"/>
+              <a:rPr sz="2400" b="1" i="0">
+                <a:solidFill>
+                  <a:srgbClr val="7BE0EA"/>
                 </a:solidFill>
               </a:rPr>
-              <a:t>자가용 · 주차</a:t>
+              <a:t>03</a:t>
             </a:r>
           </a:p>
         </p:txBody>
@@ -4992,8 +5141,46 @@
         </p:nvSpPr>
         <p:spPr>
           <a:xfrm>
-            <a:off x="8143036" y="3017520"/>
-            <a:ext cx="3088538" cy="3017520"/>
+            <a:off x="8203996" y="2560320"/>
+            <a:ext cx="3210458" cy="640080"/>
+          </a:xfrm>
+          <a:prstGeom prst="rect">
+            <a:avLst/>
+          </a:prstGeom>
+          <a:noFill/>
+        </p:spPr>
+        <p:txBody>
+          <a:bodyPr wrap="square" lIns="54864" rIns="54864" tIns="27432" bIns="27432" anchor="ctr">
+            <a:noAutofit/>
+          </a:bodyPr>
+          <a:lstStyle/>
+          <a:p>
+            <a:pPr algn="l">
+              <a:lnSpc>
+                <a:spcPct val="115000"/>
+              </a:lnSpc>
+            </a:pPr>
+            <a:r>
+              <a:rPr sz="1800" b="1" i="0">
+                <a:solidFill>
+                  <a:srgbClr val="274649"/>
+                </a:solidFill>
+              </a:rPr>
+              <a:t>자가용 · 주차</a:t>
+            </a:r>
+          </a:p>
+        </p:txBody>
+      </p:sp>
+      <p:sp>
+        <p:nvSpPr>
+          <p:cNvPr id="17" name="TextBox 16"/>
+          <p:cNvSpPr txBox="1"/>
+          <p:nvPr/>
+        </p:nvSpPr>
+        <p:spPr>
+          <a:xfrm>
+            <a:off x="8203996" y="3246120"/>
+            <a:ext cx="3210458" cy="2971800"/>
           </a:xfrm>
           <a:prstGeom prst="rect">
             <a:avLst/>
@@ -5014,7 +5201,7 @@
             <a:r>
               <a:rPr sz="1500" b="0" i="0">
                 <a:solidFill>
-                  <a:srgbClr val="2B2B2B"/>
+                  <a:srgbClr val="26231F"/>
                 </a:solidFill>
               </a:rPr>
               <a:t>입력하세요</a:t>
@@ -5036,7 +5223,7 @@
     <p:bg>
       <p:bgPr>
         <a:solidFill>
-          <a:srgbClr val="EEFBFC"/>
+          <a:srgbClr val="D1F7FA"/>
         </a:solidFill>
         <a:effectLst/>
       </p:bgPr>
@@ -5050,77 +5237,77 @@
       <p:grpSpPr/>
       <p:sp>
         <p:nvSpPr>
-          <p:cNvPr id="3" name="장식"/>
+          <p:cNvPr id="3" name="포인트"/>
           <p:cNvSpPr/>
           <p:nvPr/>
         </p:nvSpPr>
         <p:spPr>
           <a:xfrm>
-            <a:off x="256032" y="256032"/>
-            <a:ext cx="11679631" cy="6345936"/>
+            <a:off x="5958687" y="246888"/>
+            <a:ext cx="274320" cy="274320"/>
+          </a:xfrm>
+          <a:prstGeom prst="heart">
+            <a:avLst/>
+          </a:prstGeom>
+          <a:solidFill>
+            <a:srgbClr val="7BE0EA"/>
+          </a:solidFill>
+          <a:ln>
+            <a:noFill/>
+          </a:ln>
+        </p:spPr>
+        <p:txBody>
+          <a:bodyPr rtlCol="0" anchor="ctr"/>
+          <a:lstStyle/>
+          <a:p>
+            <a:pPr algn="ctr"/>
+          </a:p>
+        </p:txBody>
+      </p:sp>
+      <p:sp>
+        <p:nvSpPr>
+          <p:cNvPr id="4" name="장식"/>
+          <p:cNvSpPr/>
+          <p:nvPr/>
+        </p:nvSpPr>
+        <p:spPr>
+          <a:xfrm>
+            <a:off x="5684367" y="1572768"/>
+            <a:ext cx="822960" cy="22860"/>
+          </a:xfrm>
+          <a:prstGeom prst="rect">
+            <a:avLst/>
+          </a:prstGeom>
+          <a:solidFill>
+            <a:srgbClr val="7BE0EA"/>
+          </a:solidFill>
+          <a:ln>
+            <a:noFill/>
+          </a:ln>
+        </p:spPr>
+        <p:txBody>
+          <a:bodyPr rtlCol="0" anchor="ctr"/>
+          <a:lstStyle/>
+          <a:p>
+            <a:pPr algn="ctr"/>
+          </a:p>
+        </p:txBody>
+      </p:sp>
+      <p:sp>
+        <p:nvSpPr>
+          <p:cNvPr id="5" name="상단 라벨"/>
+          <p:cNvSpPr txBox="1"/>
+          <p:nvPr/>
+        </p:nvSpPr>
+        <p:spPr>
+          <a:xfrm>
+            <a:off x="640080" y="182880"/>
+            <a:ext cx="3657600" cy="274320"/>
           </a:xfrm>
           <a:prstGeom prst="rect">
             <a:avLst/>
           </a:prstGeom>
           <a:noFill/>
-          <a:ln w="28575">
-            <a:solidFill>
-              <a:srgbClr val="26B8C5"/>
-            </a:solidFill>
-          </a:ln>
-        </p:spPr>
-        <p:txBody>
-          <a:bodyPr rtlCol="0" anchor="ctr"/>
-          <a:lstStyle/>
-          <a:p>
-            <a:pPr algn="ctr"/>
-          </a:p>
-        </p:txBody>
-      </p:sp>
-      <p:sp>
-        <p:nvSpPr>
-          <p:cNvPr id="4" name="장식"/>
-          <p:cNvSpPr/>
-          <p:nvPr/>
-        </p:nvSpPr>
-        <p:spPr>
-          <a:xfrm>
-            <a:off x="384048" y="384048"/>
-            <a:ext cx="11423599" cy="6089904"/>
-          </a:xfrm>
-          <a:prstGeom prst="rect">
-            <a:avLst/>
-          </a:prstGeom>
-          <a:noFill/>
-          <a:ln w="9525">
-            <a:solidFill>
-              <a:srgbClr val="D1F7FA"/>
-            </a:solidFill>
-          </a:ln>
-        </p:spPr>
-        <p:txBody>
-          <a:bodyPr rtlCol="0" anchor="ctr"/>
-          <a:lstStyle/>
-          <a:p>
-            <a:pPr algn="ctr"/>
-          </a:p>
-        </p:txBody>
-      </p:sp>
-      <p:sp>
-        <p:nvSpPr>
-          <p:cNvPr id="2" name="Title 1"/>
-          <p:cNvSpPr>
-            <a:spLocks noGrp="1"/>
-          </p:cNvSpPr>
-          <p:nvPr>
-            <p:ph type="title"/>
-          </p:nvPr>
-        </p:nvSpPr>
-        <p:spPr>
-          <a:xfrm>
-            <a:off x="822960" y="548640"/>
-            <a:ext cx="9265615" cy="822960"/>
-          </a:xfrm>
         </p:spPr>
         <p:txBody>
           <a:bodyPr wrap="square" lIns="54864" rIns="54864" tIns="27432" bIns="27432" anchor="ctr">
@@ -5129,6 +5316,44 @@
           <a:lstStyle/>
           <a:p>
             <a:pPr algn="l">
+              <a:lnSpc>
+                <a:spcPct val="115000"/>
+              </a:lnSpc>
+            </a:pPr>
+            <a:r>
+              <a:rPr sz="800" b="1" i="0" spc="250">
+                <a:solidFill>
+                  <a:srgbClr val="8E8780"/>
+                </a:solidFill>
+              </a:rPr>
+              <a:t>WEDDING</a:t>
+            </a:r>
+          </a:p>
+        </p:txBody>
+      </p:sp>
+      <p:sp>
+        <p:nvSpPr>
+          <p:cNvPr id="2" name="Title 1"/>
+          <p:cNvSpPr>
+            <a:spLocks noGrp="1"/>
+          </p:cNvSpPr>
+          <p:nvPr>
+            <p:ph type="title"/>
+          </p:nvPr>
+        </p:nvSpPr>
+        <p:spPr>
+          <a:xfrm>
+            <a:off x="1371600" y="640080"/>
+            <a:ext cx="9448495" cy="868680"/>
+          </a:xfrm>
+        </p:spPr>
+        <p:txBody>
+          <a:bodyPr wrap="square" lIns="54864" rIns="54864" tIns="27432" bIns="27432" anchor="ctr">
+            <a:noAutofit/>
+          </a:bodyPr>
+          <a:lstStyle/>
+          <a:p>
+            <a:pPr algn="ctr">
               <a:lnSpc>
                 <a:spcPct val="105000"/>
               </a:lnSpc>
@@ -5136,7 +5361,7 @@
             <a:r>
               <a:rPr sz="3000" b="1" i="0">
                 <a:solidFill>
-                  <a:srgbClr val="11595F"/>
+                  <a:srgbClr val="26231F"/>
                 </a:solidFill>
               </a:rPr>
               <a:t>웨딩 사진</a:t>
@@ -5146,14 +5371,14 @@
       </p:sp>
       <p:sp>
         <p:nvSpPr>
-          <p:cNvPr id="5" name="사진 자리"/>
+          <p:cNvPr id="6" name="사진 자리"/>
           <p:cNvSpPr/>
           <p:nvPr/>
         </p:nvSpPr>
         <p:spPr>
           <a:xfrm>
-            <a:off x="822960" y="1554480"/>
-            <a:ext cx="3393338" cy="2217420"/>
+            <a:off x="640080" y="1783080"/>
+            <a:ext cx="3515258" cy="2194560"/>
           </a:xfrm>
           <a:prstGeom prst="roundRect">
             <a:avLst>
@@ -5164,9 +5389,7 @@
             <a:srgbClr val="D1F7FA"/>
           </a:solidFill>
           <a:ln w="19050">
-            <a:solidFill>
-              <a:srgbClr val="26B8C5"/>
-            </a:solidFill>
+            <a:noFill/>
             <a:prstDash val="dash"/>
           </a:ln>
         </p:spPr>
@@ -5184,7 +5407,7 @@
             <a:r>
               <a:rPr sz="1200" b="0" i="0">
                 <a:solidFill>
-                  <a:srgbClr val="11595F"/>
+                  <a:srgbClr val="8E8780"/>
                 </a:solidFill>
               </a:rPr>
               <a:t>사진 1</a:t>
@@ -5194,14 +5417,14 @@
       </p:sp>
       <p:sp>
         <p:nvSpPr>
-          <p:cNvPr id="6" name="사진 자리"/>
+          <p:cNvPr id="7" name="사진 자리"/>
           <p:cNvSpPr/>
           <p:nvPr/>
         </p:nvSpPr>
         <p:spPr>
           <a:xfrm>
-            <a:off x="4399178" y="1554480"/>
-            <a:ext cx="3393338" cy="2217420"/>
+            <a:off x="4338218" y="1783080"/>
+            <a:ext cx="3515258" cy="2194560"/>
           </a:xfrm>
           <a:prstGeom prst="roundRect">
             <a:avLst>
@@ -5212,9 +5435,7 @@
             <a:srgbClr val="D1F7FA"/>
           </a:solidFill>
           <a:ln w="19050">
-            <a:solidFill>
-              <a:srgbClr val="26B8C5"/>
-            </a:solidFill>
+            <a:noFill/>
             <a:prstDash val="dash"/>
           </a:ln>
         </p:spPr>
@@ -5232,7 +5453,7 @@
             <a:r>
               <a:rPr sz="1200" b="0" i="0">
                 <a:solidFill>
-                  <a:srgbClr val="11595F"/>
+                  <a:srgbClr val="8E8780"/>
                 </a:solidFill>
               </a:rPr>
               <a:t>사진 2</a:t>
@@ -5242,14 +5463,14 @@
       </p:sp>
       <p:sp>
         <p:nvSpPr>
-          <p:cNvPr id="7" name="사진 자리"/>
+          <p:cNvPr id="8" name="사진 자리"/>
           <p:cNvSpPr/>
           <p:nvPr/>
         </p:nvSpPr>
         <p:spPr>
           <a:xfrm>
-            <a:off x="7975396" y="1554480"/>
-            <a:ext cx="3393338" cy="2217420"/>
+            <a:off x="8036356" y="1783080"/>
+            <a:ext cx="3515258" cy="2194560"/>
           </a:xfrm>
           <a:prstGeom prst="roundRect">
             <a:avLst>
@@ -5260,9 +5481,7 @@
             <a:srgbClr val="D1F7FA"/>
           </a:solidFill>
           <a:ln w="19050">
-            <a:solidFill>
-              <a:srgbClr val="26B8C5"/>
-            </a:solidFill>
+            <a:noFill/>
             <a:prstDash val="dash"/>
           </a:ln>
         </p:spPr>
@@ -5280,7 +5499,7 @@
             <a:r>
               <a:rPr sz="1200" b="0" i="0">
                 <a:solidFill>
-                  <a:srgbClr val="11595F"/>
+                  <a:srgbClr val="8E8780"/>
                 </a:solidFill>
               </a:rPr>
               <a:t>사진 3</a:t>
@@ -5290,14 +5509,14 @@
       </p:sp>
       <p:sp>
         <p:nvSpPr>
-          <p:cNvPr id="8" name="사진 자리"/>
+          <p:cNvPr id="9" name="사진 자리"/>
           <p:cNvSpPr/>
           <p:nvPr/>
         </p:nvSpPr>
         <p:spPr>
           <a:xfrm>
-            <a:off x="822960" y="3954780"/>
-            <a:ext cx="3393338" cy="2217420"/>
+            <a:off x="640080" y="4160520"/>
+            <a:ext cx="3515258" cy="2194560"/>
           </a:xfrm>
           <a:prstGeom prst="roundRect">
             <a:avLst>
@@ -5308,9 +5527,7 @@
             <a:srgbClr val="D1F7FA"/>
           </a:solidFill>
           <a:ln w="19050">
-            <a:solidFill>
-              <a:srgbClr val="26B8C5"/>
-            </a:solidFill>
+            <a:noFill/>
             <a:prstDash val="dash"/>
           </a:ln>
         </p:spPr>
@@ -5328,7 +5545,7 @@
             <a:r>
               <a:rPr sz="1200" b="0" i="0">
                 <a:solidFill>
-                  <a:srgbClr val="11595F"/>
+                  <a:srgbClr val="8E8780"/>
                 </a:solidFill>
               </a:rPr>
               <a:t>사진 4</a:t>
@@ -5338,14 +5555,14 @@
       </p:sp>
       <p:sp>
         <p:nvSpPr>
-          <p:cNvPr id="9" name="사진 자리"/>
+          <p:cNvPr id="10" name="사진 자리"/>
           <p:cNvSpPr/>
           <p:nvPr/>
         </p:nvSpPr>
         <p:spPr>
           <a:xfrm>
-            <a:off x="4399178" y="3954780"/>
-            <a:ext cx="3393338" cy="2217420"/>
+            <a:off x="4338218" y="4160520"/>
+            <a:ext cx="3515258" cy="2194560"/>
           </a:xfrm>
           <a:prstGeom prst="roundRect">
             <a:avLst>
@@ -5356,9 +5573,7 @@
             <a:srgbClr val="D1F7FA"/>
           </a:solidFill>
           <a:ln w="19050">
-            <a:solidFill>
-              <a:srgbClr val="26B8C5"/>
-            </a:solidFill>
+            <a:noFill/>
             <a:prstDash val="dash"/>
           </a:ln>
         </p:spPr>
@@ -5376,7 +5591,7 @@
             <a:r>
               <a:rPr sz="1200" b="0" i="0">
                 <a:solidFill>
-                  <a:srgbClr val="11595F"/>
+                  <a:srgbClr val="8E8780"/>
                 </a:solidFill>
               </a:rPr>
               <a:t>사진 5</a:t>
@@ -5386,14 +5601,14 @@
       </p:sp>
       <p:sp>
         <p:nvSpPr>
-          <p:cNvPr id="10" name="사진 자리"/>
+          <p:cNvPr id="11" name="사진 자리"/>
           <p:cNvSpPr/>
           <p:nvPr/>
         </p:nvSpPr>
         <p:spPr>
           <a:xfrm>
-            <a:off x="7975396" y="3954780"/>
-            <a:ext cx="3393338" cy="2217420"/>
+            <a:off x="8036356" y="4160520"/>
+            <a:ext cx="3515258" cy="2194560"/>
           </a:xfrm>
           <a:prstGeom prst="roundRect">
             <a:avLst>
@@ -5404,9 +5619,7 @@
             <a:srgbClr val="D1F7FA"/>
           </a:solidFill>
           <a:ln w="19050">
-            <a:solidFill>
-              <a:srgbClr val="26B8C5"/>
-            </a:solidFill>
+            <a:noFill/>
             <a:prstDash val="dash"/>
           </a:ln>
         </p:spPr>
@@ -5424,7 +5637,7 @@
             <a:r>
               <a:rPr sz="1200" b="0" i="0">
                 <a:solidFill>
-                  <a:srgbClr val="11595F"/>
+                  <a:srgbClr val="8E8780"/>
                 </a:solidFill>
               </a:rPr>
               <a:t>사진 6</a:t>
@@ -5443,6 +5656,14 @@
 <file path=ppt/slides/slide6.xml><?xml version="1.0" encoding="utf-8"?>
 <p:sld xmlns:a="http://schemas.openxmlformats.org/drawingml/2006/main" xmlns:p="http://schemas.openxmlformats.org/presentationml/2006/main" xmlns:r="http://schemas.openxmlformats.org/officeDocument/2006/relationships">
   <p:cSld>
+    <p:bg>
+      <p:bgPr>
+        <a:solidFill>
+          <a:srgbClr val="EAFBFD"/>
+        </a:solidFill>
+        <a:effectLst/>
+      </p:bgPr>
+    </p:bg>
     <p:spTree>
       <p:nvGrpSpPr>
         <p:cNvPr id="1" name=""/>
@@ -5450,30 +5671,116 @@
         <p:nvPr/>
       </p:nvGrpSpPr>
       <p:grpSpPr/>
-      <p:pic>
-        <p:nvPicPr>
-          <p:cNvPr id="3" name="표지 그림" descr="wedding-24.jpg"/>
-          <p:cNvPicPr>
-            <a:picLocks noChangeAspect="1"/>
-          </p:cNvPicPr>
+      <p:sp>
+        <p:nvSpPr>
+          <p:cNvPr id="3" name="사진 자리"/>
+          <p:cNvSpPr/>
           <p:nvPr/>
-        </p:nvPicPr>
-        <p:blipFill>
-          <a:blip r:embed="rId2"/>
-          <a:stretch>
-            <a:fillRect/>
-          </a:stretch>
-        </p:blipFill>
+        </p:nvSpPr>
         <p:spPr>
           <a:xfrm>
             <a:off x="0" y="0"/>
-            <a:ext cx="12191695" cy="6858000"/>
+            <a:ext cx="4389010" cy="6858000"/>
           </a:xfrm>
           <a:prstGeom prst="rect">
             <a:avLst/>
           </a:prstGeom>
-        </p:spPr>
-      </p:pic>
+          <a:solidFill>
+            <a:srgbClr val="A5EDF3"/>
+          </a:solidFill>
+          <a:ln>
+            <a:noFill/>
+          </a:ln>
+        </p:spPr>
+        <p:txBody>
+          <a:bodyPr rtlCol="0" anchor="ctr" wrap="square" lIns="54864" rIns="54864" tIns="27432" bIns="27432">
+            <a:noAutofit/>
+          </a:bodyPr>
+          <a:lstStyle/>
+          <a:p>
+            <a:pPr algn="ctr">
+              <a:lnSpc>
+                <a:spcPct val="100000"/>
+              </a:lnSpc>
+            </a:pPr>
+            <a:r>
+              <a:rPr sz="1400" b="0" i="0">
+                <a:solidFill>
+                  <a:srgbClr val="274649"/>
+                </a:solidFill>
+              </a:rPr>
+              <a:t>사진을 넣어 주세요</a:t>
+            </a:r>
+          </a:p>
+        </p:txBody>
+      </p:sp>
+      <p:sp>
+        <p:nvSpPr>
+          <p:cNvPr id="4" name="장식"/>
+          <p:cNvSpPr/>
+          <p:nvPr/>
+        </p:nvSpPr>
+        <p:spPr>
+          <a:xfrm>
+            <a:off x="365750" y="365760"/>
+            <a:ext cx="3657508" cy="6126480"/>
+          </a:xfrm>
+          <a:prstGeom prst="rect">
+            <a:avLst/>
+          </a:prstGeom>
+          <a:noFill/>
+          <a:ln w="9525">
+            <a:solidFill>
+              <a:srgbClr val="26231F"/>
+            </a:solidFill>
+          </a:ln>
+        </p:spPr>
+        <p:txBody>
+          <a:bodyPr rtlCol="0" anchor="ctr"/>
+          <a:lstStyle/>
+          <a:p>
+            <a:pPr algn="ctr"/>
+          </a:p>
+        </p:txBody>
+      </p:sp>
+      <p:sp>
+        <p:nvSpPr>
+          <p:cNvPr id="5" name="라벨"/>
+          <p:cNvSpPr txBox="1"/>
+          <p:nvPr/>
+        </p:nvSpPr>
+        <p:spPr>
+          <a:xfrm>
+            <a:off x="6827349" y="2148840"/>
+            <a:ext cx="4632844" cy="274320"/>
+          </a:xfrm>
+          <a:prstGeom prst="rect">
+            <a:avLst/>
+          </a:prstGeom>
+          <a:noFill/>
+        </p:spPr>
+        <p:txBody>
+          <a:bodyPr wrap="square" lIns="54864" rIns="54864" tIns="27432" bIns="27432" anchor="t">
+            <a:noAutofit/>
+          </a:bodyPr>
+          <a:lstStyle/>
+          <a:p>
+            <a:pPr algn="l">
+              <a:lnSpc>
+                <a:spcPct val="115000"/>
+              </a:lnSpc>
+            </a:pPr>
+            <a:r>
+              <a:rPr sz="1000" b="1" i="0" spc="250">
+                <a:solidFill>
+                  <a:srgbClr val="26231F"/>
+                </a:solidFill>
+              </a:rPr>
+              <a:t>WEDDING</a:t>
+            </a:r>
+          </a:p>
+        </p:txBody>
+      </p:sp>
       <p:sp>
         <p:nvSpPr>
           <p:cNvPr id="2" name="Title 1"/>
@@ -5486,8 +5793,8 @@
         </p:nvSpPr>
         <p:spPr>
           <a:xfrm>
-            <a:off x="853418" y="2057400"/>
-            <a:ext cx="6095847" cy="1554480"/>
+            <a:off x="6827349" y="2606040"/>
+            <a:ext cx="4632844" cy="1188720"/>
           </a:xfrm>
         </p:spPr>
         <p:txBody>
@@ -5504,7 +5811,7 @@
             <a:r>
               <a:rPr sz="3400" b="1" i="0">
                 <a:solidFill>
-                  <a:srgbClr val="11595F"/>
+                  <a:srgbClr val="26231F"/>
                 </a:solidFill>
               </a:rPr>
               <a:t>와 주셔서 고맙습니다</a:t>
@@ -5514,14 +5821,14 @@
       </p:sp>
       <p:sp>
         <p:nvSpPr>
-          <p:cNvPr id="4" name="한 줄 문구"/>
+          <p:cNvPr id="6" name="한 줄 문구"/>
           <p:cNvSpPr txBox="1"/>
           <p:nvPr/>
         </p:nvSpPr>
         <p:spPr>
           <a:xfrm>
-            <a:off x="853418" y="3749039"/>
-            <a:ext cx="6095847" cy="822960"/>
+            <a:off x="6827349" y="3886200"/>
+            <a:ext cx="4632844" cy="822960"/>
           </a:xfrm>
           <a:prstGeom prst="rect">
             <a:avLst/>
@@ -5540,9 +5847,9 @@
               </a:lnSpc>
             </a:pPr>
             <a:r>
-              <a:rPr sz="1700" b="0" i="1">
-                <a:solidFill>
-                  <a:srgbClr val="11595F"/>
+              <a:rPr sz="1700" b="0" i="0">
+                <a:solidFill>
+                  <a:srgbClr val="26231F"/>
                 </a:solidFill>
               </a:rPr>
               <a:t>잘 살겠습니다</a:t>
@@ -5552,14 +5859,14 @@
       </p:sp>
       <p:sp>
         <p:nvSpPr>
-          <p:cNvPr id="5" name="안내 문구"/>
+          <p:cNvPr id="7" name="안내 문구"/>
           <p:cNvSpPr txBox="1"/>
           <p:nvPr/>
         </p:nvSpPr>
         <p:spPr>
           <a:xfrm>
-            <a:off x="853418" y="4617720"/>
-            <a:ext cx="6095847" cy="914400"/>
+            <a:off x="6827349" y="4754880"/>
+            <a:ext cx="4632844" cy="914400"/>
           </a:xfrm>
           <a:prstGeom prst="rect">
             <a:avLst/>
@@ -5580,7 +5887,7 @@
             <a:r>
               <a:rPr sz="1400" b="0" i="0">
                 <a:solidFill>
-                  <a:srgbClr val="666666"/>
+                  <a:srgbClr val="26231F"/>
                 </a:solidFill>
               </a:rPr>
               <a:t>신랑 이름 ♥ 신부 이름</a:t>
@@ -5607,34 +5914,34 @@
         <a:sysClr val="window" lastClr="FFFFFF"/>
       </a:lt1>
       <a:dk2>
-        <a:srgbClr val="11595F"/>
+        <a:srgbClr val="274649"/>
       </a:dk2>
       <a:lt2>
-        <a:srgbClr val="EEFBFC"/>
+        <a:srgbClr val="EAFBFD"/>
       </a:lt2>
       <a:accent1>
-        <a:srgbClr val="26B8C5"/>
+        <a:srgbClr val="7BE0EA"/>
       </a:accent1>
       <a:accent2>
-        <a:srgbClr val="209DB6"/>
+        <a:srgbClr val="9FC3EF"/>
       </a:accent2>
       <a:accent3>
-        <a:srgbClr val="11595F"/>
+        <a:srgbClr val="274649"/>
       </a:accent3>
       <a:accent4>
         <a:srgbClr val="D1F7FA"/>
       </a:accent4>
       <a:accent5>
-        <a:srgbClr val="23AABE"/>
+        <a:srgbClr val="8DD2EC"/>
       </a:accent5>
       <a:accent6>
-        <a:srgbClr val="709B9F"/>
+        <a:srgbClr val="7D9092"/>
       </a:accent6>
       <a:hlink>
-        <a:srgbClr val="26B8C5"/>
+        <a:srgbClr val="7BE0EA"/>
       </a:hlink>
       <a:folHlink>
-        <a:srgbClr val="11595F"/>
+        <a:srgbClr val="274649"/>
       </a:folHlink>
     </a:clrScheme>
     <a:fontScheme name="Office">
